--- a/Modern-Physics/lecture/04_Atomic_Structure/l4.pptx
+++ b/Modern-Physics/lecture/04_Atomic_Structure/l4.pptx
@@ -4,9 +4,15 @@
   <p:sldMasterIdLst>
     <p:sldMasterId id="2147483648" r:id="rId1"/>
   </p:sldMasterIdLst>
+  <p:notesMasterIdLst>
+    <p:notesMasterId r:id="rId7"/>
+  </p:notesMasterIdLst>
   <p:sldIdLst>
     <p:sldId id="256" r:id="rId2"/>
     <p:sldId id="259" r:id="rId3"/>
+    <p:sldId id="260" r:id="rId4"/>
+    <p:sldId id="261" r:id="rId5"/>
+    <p:sldId id="262" r:id="rId6"/>
   </p:sldIdLst>
   <p:sldSz cx="12192000" cy="6858000"/>
   <p:notesSz cx="6858000" cy="9144000"/>
@@ -113,6 +119,607 @@
 </p:presentation>
 </file>
 
+<file path=ppt/notesMasters/notesMaster1.xml><?xml version="1.0" encoding="utf-8"?>
+<p:notesMaster xmlns:a="http://schemas.openxmlformats.org/drawingml/2006/main" xmlns:r="http://schemas.openxmlformats.org/officeDocument/2006/relationships" xmlns:p="http://schemas.openxmlformats.org/presentationml/2006/main">
+  <p:cSld>
+    <p:bg>
+      <p:bgRef idx="1001">
+        <a:schemeClr val="bg1"/>
+      </p:bgRef>
+    </p:bg>
+    <p:spTree>
+      <p:nvGrpSpPr>
+        <p:cNvPr id="1" name=""/>
+        <p:cNvGrpSpPr/>
+        <p:nvPr/>
+      </p:nvGrpSpPr>
+      <p:grpSpPr>
+        <a:xfrm>
+          <a:off x="0" y="0"/>
+          <a:ext cx="0" cy="0"/>
+          <a:chOff x="0" y="0"/>
+          <a:chExt cx="0" cy="0"/>
+        </a:xfrm>
+      </p:grpSpPr>
+      <p:sp>
+        <p:nvSpPr>
+          <p:cNvPr id="2" name="頁首版面配置區 1"/>
+          <p:cNvSpPr>
+            <a:spLocks noGrp="1"/>
+          </p:cNvSpPr>
+          <p:nvPr>
+            <p:ph type="hdr" sz="quarter"/>
+          </p:nvPr>
+        </p:nvSpPr>
+        <p:spPr>
+          <a:xfrm>
+            <a:off x="0" y="0"/>
+            <a:ext cx="2971800" cy="458788"/>
+          </a:xfrm>
+          <a:prstGeom prst="rect">
+            <a:avLst/>
+          </a:prstGeom>
+        </p:spPr>
+        <p:txBody>
+          <a:bodyPr vert="horz" lIns="91440" tIns="45720" rIns="91440" bIns="45720" rtlCol="0"/>
+          <a:lstStyle>
+            <a:lvl1pPr algn="l">
+              <a:defRPr sz="1200"/>
+            </a:lvl1pPr>
+          </a:lstStyle>
+          <a:p>
+            <a:endParaRPr lang="zh-TW" altLang="en-US"/>
+          </a:p>
+        </p:txBody>
+      </p:sp>
+      <p:sp>
+        <p:nvSpPr>
+          <p:cNvPr id="3" name="日期版面配置區 2"/>
+          <p:cNvSpPr>
+            <a:spLocks noGrp="1"/>
+          </p:cNvSpPr>
+          <p:nvPr>
+            <p:ph type="dt" idx="1"/>
+          </p:nvPr>
+        </p:nvSpPr>
+        <p:spPr>
+          <a:xfrm>
+            <a:off x="3884613" y="0"/>
+            <a:ext cx="2971800" cy="458788"/>
+          </a:xfrm>
+          <a:prstGeom prst="rect">
+            <a:avLst/>
+          </a:prstGeom>
+        </p:spPr>
+        <p:txBody>
+          <a:bodyPr vert="horz" lIns="91440" tIns="45720" rIns="91440" bIns="45720" rtlCol="0"/>
+          <a:lstStyle>
+            <a:lvl1pPr algn="r">
+              <a:defRPr sz="1200"/>
+            </a:lvl1pPr>
+          </a:lstStyle>
+          <a:p>
+            <a:fld id="{9A0A92F6-DB74-441C-AE03-347A3A27B69C}" type="datetimeFigureOut">
+              <a:rPr lang="zh-TW" altLang="en-US" smtClean="0"/>
+              <a:t>2026/4/15</a:t>
+            </a:fld>
+            <a:endParaRPr lang="zh-TW" altLang="en-US"/>
+          </a:p>
+        </p:txBody>
+      </p:sp>
+      <p:sp>
+        <p:nvSpPr>
+          <p:cNvPr id="4" name="投影片影像版面配置區 3"/>
+          <p:cNvSpPr>
+            <a:spLocks noGrp="1" noRot="1" noChangeAspect="1"/>
+          </p:cNvSpPr>
+          <p:nvPr>
+            <p:ph type="sldImg" idx="2"/>
+          </p:nvPr>
+        </p:nvSpPr>
+        <p:spPr>
+          <a:xfrm>
+            <a:off x="685800" y="1143000"/>
+            <a:ext cx="5486400" cy="3086100"/>
+          </a:xfrm>
+          <a:prstGeom prst="rect">
+            <a:avLst/>
+          </a:prstGeom>
+          <a:noFill/>
+          <a:ln w="12700">
+            <a:solidFill>
+              <a:prstClr val="black"/>
+            </a:solidFill>
+          </a:ln>
+        </p:spPr>
+        <p:txBody>
+          <a:bodyPr vert="horz" lIns="91440" tIns="45720" rIns="91440" bIns="45720" rtlCol="0" anchor="ctr"/>
+          <a:lstStyle/>
+          <a:p>
+            <a:endParaRPr lang="zh-TW" altLang="en-US"/>
+          </a:p>
+        </p:txBody>
+      </p:sp>
+      <p:sp>
+        <p:nvSpPr>
+          <p:cNvPr id="5" name="備忘稿版面配置區 4"/>
+          <p:cNvSpPr>
+            <a:spLocks noGrp="1"/>
+          </p:cNvSpPr>
+          <p:nvPr>
+            <p:ph type="body" sz="quarter" idx="3"/>
+          </p:nvPr>
+        </p:nvSpPr>
+        <p:spPr>
+          <a:xfrm>
+            <a:off x="685800" y="4400550"/>
+            <a:ext cx="5486400" cy="3600450"/>
+          </a:xfrm>
+          <a:prstGeom prst="rect">
+            <a:avLst/>
+          </a:prstGeom>
+        </p:spPr>
+        <p:txBody>
+          <a:bodyPr vert="horz" lIns="91440" tIns="45720" rIns="91440" bIns="45720" rtlCol="0"/>
+          <a:lstStyle/>
+          <a:p>
+            <a:pPr lvl="0"/>
+            <a:r>
+              <a:rPr lang="zh-TW" altLang="en-US"/>
+              <a:t>按一下以編輯母片文字樣式</a:t>
+            </a:r>
+          </a:p>
+          <a:p>
+            <a:pPr lvl="1"/>
+            <a:r>
+              <a:rPr lang="zh-TW" altLang="en-US"/>
+              <a:t>第二層</a:t>
+            </a:r>
+          </a:p>
+          <a:p>
+            <a:pPr lvl="2"/>
+            <a:r>
+              <a:rPr lang="zh-TW" altLang="en-US"/>
+              <a:t>第三層</a:t>
+            </a:r>
+          </a:p>
+          <a:p>
+            <a:pPr lvl="3"/>
+            <a:r>
+              <a:rPr lang="zh-TW" altLang="en-US"/>
+              <a:t>第四層</a:t>
+            </a:r>
+          </a:p>
+          <a:p>
+            <a:pPr lvl="4"/>
+            <a:r>
+              <a:rPr lang="zh-TW" altLang="en-US"/>
+              <a:t>第五層</a:t>
+            </a:r>
+          </a:p>
+        </p:txBody>
+      </p:sp>
+      <p:sp>
+        <p:nvSpPr>
+          <p:cNvPr id="6" name="頁尾版面配置區 5"/>
+          <p:cNvSpPr>
+            <a:spLocks noGrp="1"/>
+          </p:cNvSpPr>
+          <p:nvPr>
+            <p:ph type="ftr" sz="quarter" idx="4"/>
+          </p:nvPr>
+        </p:nvSpPr>
+        <p:spPr>
+          <a:xfrm>
+            <a:off x="0" y="8685213"/>
+            <a:ext cx="2971800" cy="458787"/>
+          </a:xfrm>
+          <a:prstGeom prst="rect">
+            <a:avLst/>
+          </a:prstGeom>
+        </p:spPr>
+        <p:txBody>
+          <a:bodyPr vert="horz" lIns="91440" tIns="45720" rIns="91440" bIns="45720" rtlCol="0" anchor="b"/>
+          <a:lstStyle>
+            <a:lvl1pPr algn="l">
+              <a:defRPr sz="1200"/>
+            </a:lvl1pPr>
+          </a:lstStyle>
+          <a:p>
+            <a:endParaRPr lang="zh-TW" altLang="en-US"/>
+          </a:p>
+        </p:txBody>
+      </p:sp>
+      <p:sp>
+        <p:nvSpPr>
+          <p:cNvPr id="7" name="投影片編號版面配置區 6"/>
+          <p:cNvSpPr>
+            <a:spLocks noGrp="1"/>
+          </p:cNvSpPr>
+          <p:nvPr>
+            <p:ph type="sldNum" sz="quarter" idx="5"/>
+          </p:nvPr>
+        </p:nvSpPr>
+        <p:spPr>
+          <a:xfrm>
+            <a:off x="3884613" y="8685213"/>
+            <a:ext cx="2971800" cy="458787"/>
+          </a:xfrm>
+          <a:prstGeom prst="rect">
+            <a:avLst/>
+          </a:prstGeom>
+        </p:spPr>
+        <p:txBody>
+          <a:bodyPr vert="horz" lIns="91440" tIns="45720" rIns="91440" bIns="45720" rtlCol="0" anchor="b"/>
+          <a:lstStyle>
+            <a:lvl1pPr algn="r">
+              <a:defRPr sz="1200"/>
+            </a:lvl1pPr>
+          </a:lstStyle>
+          <a:p>
+            <a:fld id="{24EB3570-367B-4E20-A1EB-13BC1EC7DEA0}" type="slidenum">
+              <a:rPr lang="zh-TW" altLang="en-US" smtClean="0"/>
+              <a:t>‹#›</a:t>
+            </a:fld>
+            <a:endParaRPr lang="zh-TW" altLang="en-US"/>
+          </a:p>
+        </p:txBody>
+      </p:sp>
+    </p:spTree>
+    <p:extLst>
+      <p:ext uri="{BB962C8B-B14F-4D97-AF65-F5344CB8AC3E}">
+        <p14:creationId xmlns:p14="http://schemas.microsoft.com/office/powerpoint/2010/main" val="2676213931"/>
+      </p:ext>
+    </p:extLst>
+  </p:cSld>
+  <p:clrMap bg1="lt1" tx1="dk1" bg2="lt2" tx2="dk2" accent1="accent1" accent2="accent2" accent3="accent3" accent4="accent4" accent5="accent5" accent6="accent6" hlink="hlink" folHlink="folHlink"/>
+  <p:notesStyle>
+    <a:lvl1pPr marL="0" algn="l" defTabSz="914400" rtl="0" eaLnBrk="1" latinLnBrk="0" hangingPunct="1">
+      <a:defRPr sz="1200" kern="1200">
+        <a:solidFill>
+          <a:schemeClr val="tx1"/>
+        </a:solidFill>
+        <a:latin typeface="+mn-lt"/>
+        <a:ea typeface="+mn-ea"/>
+        <a:cs typeface="+mn-cs"/>
+      </a:defRPr>
+    </a:lvl1pPr>
+    <a:lvl2pPr marL="457200" algn="l" defTabSz="914400" rtl="0" eaLnBrk="1" latinLnBrk="0" hangingPunct="1">
+      <a:defRPr sz="1200" kern="1200">
+        <a:solidFill>
+          <a:schemeClr val="tx1"/>
+        </a:solidFill>
+        <a:latin typeface="+mn-lt"/>
+        <a:ea typeface="+mn-ea"/>
+        <a:cs typeface="+mn-cs"/>
+      </a:defRPr>
+    </a:lvl2pPr>
+    <a:lvl3pPr marL="914400" algn="l" defTabSz="914400" rtl="0" eaLnBrk="1" latinLnBrk="0" hangingPunct="1">
+      <a:defRPr sz="1200" kern="1200">
+        <a:solidFill>
+          <a:schemeClr val="tx1"/>
+        </a:solidFill>
+        <a:latin typeface="+mn-lt"/>
+        <a:ea typeface="+mn-ea"/>
+        <a:cs typeface="+mn-cs"/>
+      </a:defRPr>
+    </a:lvl3pPr>
+    <a:lvl4pPr marL="1371600" algn="l" defTabSz="914400" rtl="0" eaLnBrk="1" latinLnBrk="0" hangingPunct="1">
+      <a:defRPr sz="1200" kern="1200">
+        <a:solidFill>
+          <a:schemeClr val="tx1"/>
+        </a:solidFill>
+        <a:latin typeface="+mn-lt"/>
+        <a:ea typeface="+mn-ea"/>
+        <a:cs typeface="+mn-cs"/>
+      </a:defRPr>
+    </a:lvl4pPr>
+    <a:lvl5pPr marL="1828800" algn="l" defTabSz="914400" rtl="0" eaLnBrk="1" latinLnBrk="0" hangingPunct="1">
+      <a:defRPr sz="1200" kern="1200">
+        <a:solidFill>
+          <a:schemeClr val="tx1"/>
+        </a:solidFill>
+        <a:latin typeface="+mn-lt"/>
+        <a:ea typeface="+mn-ea"/>
+        <a:cs typeface="+mn-cs"/>
+      </a:defRPr>
+    </a:lvl5pPr>
+    <a:lvl6pPr marL="2286000" algn="l" defTabSz="914400" rtl="0" eaLnBrk="1" latinLnBrk="0" hangingPunct="1">
+      <a:defRPr sz="1200" kern="1200">
+        <a:solidFill>
+          <a:schemeClr val="tx1"/>
+        </a:solidFill>
+        <a:latin typeface="+mn-lt"/>
+        <a:ea typeface="+mn-ea"/>
+        <a:cs typeface="+mn-cs"/>
+      </a:defRPr>
+    </a:lvl6pPr>
+    <a:lvl7pPr marL="2743200" algn="l" defTabSz="914400" rtl="0" eaLnBrk="1" latinLnBrk="0" hangingPunct="1">
+      <a:defRPr sz="1200" kern="1200">
+        <a:solidFill>
+          <a:schemeClr val="tx1"/>
+        </a:solidFill>
+        <a:latin typeface="+mn-lt"/>
+        <a:ea typeface="+mn-ea"/>
+        <a:cs typeface="+mn-cs"/>
+      </a:defRPr>
+    </a:lvl7pPr>
+    <a:lvl8pPr marL="3200400" algn="l" defTabSz="914400" rtl="0" eaLnBrk="1" latinLnBrk="0" hangingPunct="1">
+      <a:defRPr sz="1200" kern="1200">
+        <a:solidFill>
+          <a:schemeClr val="tx1"/>
+        </a:solidFill>
+        <a:latin typeface="+mn-lt"/>
+        <a:ea typeface="+mn-ea"/>
+        <a:cs typeface="+mn-cs"/>
+      </a:defRPr>
+    </a:lvl8pPr>
+    <a:lvl9pPr marL="3657600" algn="l" defTabSz="914400" rtl="0" eaLnBrk="1" latinLnBrk="0" hangingPunct="1">
+      <a:defRPr sz="1200" kern="1200">
+        <a:solidFill>
+          <a:schemeClr val="tx1"/>
+        </a:solidFill>
+        <a:latin typeface="+mn-lt"/>
+        <a:ea typeface="+mn-ea"/>
+        <a:cs typeface="+mn-cs"/>
+      </a:defRPr>
+    </a:lvl9pPr>
+  </p:notesStyle>
+</p:notesMaster>
+</file>
+
+<file path=ppt/notesSlides/notesSlide1.xml><?xml version="1.0" encoding="utf-8"?>
+<p:notes xmlns:a="http://schemas.openxmlformats.org/drawingml/2006/main" xmlns:r="http://schemas.openxmlformats.org/officeDocument/2006/relationships" xmlns:p="http://schemas.openxmlformats.org/presentationml/2006/main">
+  <p:cSld>
+    <p:spTree>
+      <p:nvGrpSpPr>
+        <p:cNvPr id="1" name=""/>
+        <p:cNvGrpSpPr/>
+        <p:nvPr/>
+      </p:nvGrpSpPr>
+      <p:grpSpPr>
+        <a:xfrm>
+          <a:off x="0" y="0"/>
+          <a:ext cx="0" cy="0"/>
+          <a:chOff x="0" y="0"/>
+          <a:chExt cx="0" cy="0"/>
+        </a:xfrm>
+      </p:grpSpPr>
+      <p:sp>
+        <p:nvSpPr>
+          <p:cNvPr id="2" name="投影片影像版面配置區 1"/>
+          <p:cNvSpPr>
+            <a:spLocks noGrp="1" noRot="1" noChangeAspect="1"/>
+          </p:cNvSpPr>
+          <p:nvPr>
+            <p:ph type="sldImg"/>
+          </p:nvPr>
+        </p:nvSpPr>
+        <p:spPr/>
+      </p:sp>
+      <p:sp>
+        <p:nvSpPr>
+          <p:cNvPr id="3" name="備忘稿版面配置區 2"/>
+          <p:cNvSpPr>
+            <a:spLocks noGrp="1"/>
+          </p:cNvSpPr>
+          <p:nvPr>
+            <p:ph type="body" idx="1"/>
+          </p:nvPr>
+        </p:nvSpPr>
+        <p:spPr/>
+        <p:txBody>
+          <a:bodyPr/>
+          <a:lstStyle/>
+          <a:p>
+            <a:endParaRPr lang="zh-TW" altLang="en-US"/>
+          </a:p>
+        </p:txBody>
+      </p:sp>
+      <p:sp>
+        <p:nvSpPr>
+          <p:cNvPr id="4" name="投影片編號版面配置區 3"/>
+          <p:cNvSpPr>
+            <a:spLocks noGrp="1"/>
+          </p:cNvSpPr>
+          <p:nvPr>
+            <p:ph type="sldNum" sz="quarter" idx="5"/>
+          </p:nvPr>
+        </p:nvSpPr>
+        <p:spPr/>
+        <p:txBody>
+          <a:bodyPr/>
+          <a:lstStyle/>
+          <a:p>
+            <a:fld id="{24EB3570-367B-4E20-A1EB-13BC1EC7DEA0}" type="slidenum">
+              <a:rPr lang="zh-TW" altLang="en-US" smtClean="0"/>
+              <a:t>2</a:t>
+            </a:fld>
+            <a:endParaRPr lang="zh-TW" altLang="en-US"/>
+          </a:p>
+        </p:txBody>
+      </p:sp>
+    </p:spTree>
+    <p:extLst>
+      <p:ext uri="{BB962C8B-B14F-4D97-AF65-F5344CB8AC3E}">
+        <p14:creationId xmlns:p14="http://schemas.microsoft.com/office/powerpoint/2010/main" val="27115083"/>
+      </p:ext>
+    </p:extLst>
+  </p:cSld>
+  <p:clrMapOvr>
+    <a:masterClrMapping/>
+  </p:clrMapOvr>
+</p:notes>
+</file>
+
+<file path=ppt/notesSlides/notesSlide2.xml><?xml version="1.0" encoding="utf-8"?>
+<p:notes xmlns:a="http://schemas.openxmlformats.org/drawingml/2006/main" xmlns:r="http://schemas.openxmlformats.org/officeDocument/2006/relationships" xmlns:p="http://schemas.openxmlformats.org/presentationml/2006/main">
+  <p:cSld>
+    <p:spTree>
+      <p:nvGrpSpPr>
+        <p:cNvPr id="1" name=""/>
+        <p:cNvGrpSpPr/>
+        <p:nvPr/>
+      </p:nvGrpSpPr>
+      <p:grpSpPr>
+        <a:xfrm>
+          <a:off x="0" y="0"/>
+          <a:ext cx="0" cy="0"/>
+          <a:chOff x="0" y="0"/>
+          <a:chExt cx="0" cy="0"/>
+        </a:xfrm>
+      </p:grpSpPr>
+      <p:sp>
+        <p:nvSpPr>
+          <p:cNvPr id="2" name="投影片影像版面配置區 1"/>
+          <p:cNvSpPr>
+            <a:spLocks noGrp="1" noRot="1" noChangeAspect="1"/>
+          </p:cNvSpPr>
+          <p:nvPr>
+            <p:ph type="sldImg"/>
+          </p:nvPr>
+        </p:nvSpPr>
+        <p:spPr/>
+      </p:sp>
+      <p:sp>
+        <p:nvSpPr>
+          <p:cNvPr id="3" name="備忘稿版面配置區 2"/>
+          <p:cNvSpPr>
+            <a:spLocks noGrp="1"/>
+          </p:cNvSpPr>
+          <p:nvPr>
+            <p:ph type="body" idx="1"/>
+          </p:nvPr>
+        </p:nvSpPr>
+        <p:spPr/>
+        <p:txBody>
+          <a:bodyPr/>
+          <a:lstStyle/>
+          <a:p>
+            <a:endParaRPr lang="zh-TW" altLang="en-US"/>
+          </a:p>
+        </p:txBody>
+      </p:sp>
+      <p:sp>
+        <p:nvSpPr>
+          <p:cNvPr id="4" name="投影片編號版面配置區 3"/>
+          <p:cNvSpPr>
+            <a:spLocks noGrp="1"/>
+          </p:cNvSpPr>
+          <p:nvPr>
+            <p:ph type="sldNum" sz="quarter" idx="5"/>
+          </p:nvPr>
+        </p:nvSpPr>
+        <p:spPr/>
+        <p:txBody>
+          <a:bodyPr/>
+          <a:lstStyle/>
+          <a:p>
+            <a:fld id="{24EB3570-367B-4E20-A1EB-13BC1EC7DEA0}" type="slidenum">
+              <a:rPr lang="zh-TW" altLang="en-US" smtClean="0"/>
+              <a:t>3</a:t>
+            </a:fld>
+            <a:endParaRPr lang="zh-TW" altLang="en-US"/>
+          </a:p>
+        </p:txBody>
+      </p:sp>
+    </p:spTree>
+    <p:extLst>
+      <p:ext uri="{BB962C8B-B14F-4D97-AF65-F5344CB8AC3E}">
+        <p14:creationId xmlns:p14="http://schemas.microsoft.com/office/powerpoint/2010/main" val="1234172131"/>
+      </p:ext>
+    </p:extLst>
+  </p:cSld>
+  <p:clrMapOvr>
+    <a:masterClrMapping/>
+  </p:clrMapOvr>
+</p:notes>
+</file>
+
+<file path=ppt/notesSlides/notesSlide3.xml><?xml version="1.0" encoding="utf-8"?>
+<p:notes xmlns:a="http://schemas.openxmlformats.org/drawingml/2006/main" xmlns:r="http://schemas.openxmlformats.org/officeDocument/2006/relationships" xmlns:p="http://schemas.openxmlformats.org/presentationml/2006/main">
+  <p:cSld>
+    <p:spTree>
+      <p:nvGrpSpPr>
+        <p:cNvPr id="1" name=""/>
+        <p:cNvGrpSpPr/>
+        <p:nvPr/>
+      </p:nvGrpSpPr>
+      <p:grpSpPr>
+        <a:xfrm>
+          <a:off x="0" y="0"/>
+          <a:ext cx="0" cy="0"/>
+          <a:chOff x="0" y="0"/>
+          <a:chExt cx="0" cy="0"/>
+        </a:xfrm>
+      </p:grpSpPr>
+      <p:sp>
+        <p:nvSpPr>
+          <p:cNvPr id="2" name="投影片影像版面配置區 1"/>
+          <p:cNvSpPr>
+            <a:spLocks noGrp="1" noRot="1" noChangeAspect="1"/>
+          </p:cNvSpPr>
+          <p:nvPr>
+            <p:ph type="sldImg"/>
+          </p:nvPr>
+        </p:nvSpPr>
+        <p:spPr/>
+      </p:sp>
+      <p:sp>
+        <p:nvSpPr>
+          <p:cNvPr id="3" name="備忘稿版面配置區 2"/>
+          <p:cNvSpPr>
+            <a:spLocks noGrp="1"/>
+          </p:cNvSpPr>
+          <p:nvPr>
+            <p:ph type="body" idx="1"/>
+          </p:nvPr>
+        </p:nvSpPr>
+        <p:spPr/>
+        <p:txBody>
+          <a:bodyPr/>
+          <a:lstStyle/>
+          <a:p>
+            <a:endParaRPr lang="zh-TW" altLang="en-US"/>
+          </a:p>
+        </p:txBody>
+      </p:sp>
+      <p:sp>
+        <p:nvSpPr>
+          <p:cNvPr id="4" name="投影片編號版面配置區 3"/>
+          <p:cNvSpPr>
+            <a:spLocks noGrp="1"/>
+          </p:cNvSpPr>
+          <p:nvPr>
+            <p:ph type="sldNum" sz="quarter" idx="5"/>
+          </p:nvPr>
+        </p:nvSpPr>
+        <p:spPr/>
+        <p:txBody>
+          <a:bodyPr/>
+          <a:lstStyle/>
+          <a:p>
+            <a:fld id="{24EB3570-367B-4E20-A1EB-13BC1EC7DEA0}" type="slidenum">
+              <a:rPr lang="zh-TW" altLang="en-US" smtClean="0"/>
+              <a:t>5</a:t>
+            </a:fld>
+            <a:endParaRPr lang="zh-TW" altLang="en-US"/>
+          </a:p>
+        </p:txBody>
+      </p:sp>
+    </p:spTree>
+    <p:extLst>
+      <p:ext uri="{BB962C8B-B14F-4D97-AF65-F5344CB8AC3E}">
+        <p14:creationId xmlns:p14="http://schemas.microsoft.com/office/powerpoint/2010/main" val="1670222548"/>
+      </p:ext>
+    </p:extLst>
+  </p:cSld>
+  <p:clrMapOvr>
+    <a:masterClrMapping/>
+  </p:clrMapOvr>
+</p:notes>
+</file>
+
 <file path=ppt/slideLayouts/slideLayout1.xml><?xml version="1.0" encoding="utf-8"?>
 <p:sldLayout xmlns:a="http://schemas.openxmlformats.org/drawingml/2006/main" xmlns:r="http://schemas.openxmlformats.org/officeDocument/2006/relationships" xmlns:p="http://schemas.openxmlformats.org/presentationml/2006/main" type="title" preserve="1">
   <p:cSld name="標題投影片">
@@ -260,7 +867,7 @@
           <a:p>
             <a:fld id="{95AEDF69-78C5-4321-AD9F-E50A3E378F73}" type="datetimeFigureOut">
               <a:rPr lang="zh-TW" altLang="en-US" smtClean="0"/>
-              <a:t>2026/4/9</a:t>
+              <a:t>2026/4/15</a:t>
             </a:fld>
             <a:endParaRPr lang="zh-TW" altLang="en-US"/>
           </a:p>
@@ -458,7 +1065,7 @@
           <a:p>
             <a:fld id="{95AEDF69-78C5-4321-AD9F-E50A3E378F73}" type="datetimeFigureOut">
               <a:rPr lang="zh-TW" altLang="en-US" smtClean="0"/>
-              <a:t>2026/4/9</a:t>
+              <a:t>2026/4/15</a:t>
             </a:fld>
             <a:endParaRPr lang="zh-TW" altLang="en-US"/>
           </a:p>
@@ -666,7 +1273,7 @@
           <a:p>
             <a:fld id="{95AEDF69-78C5-4321-AD9F-E50A3E378F73}" type="datetimeFigureOut">
               <a:rPr lang="zh-TW" altLang="en-US" smtClean="0"/>
-              <a:t>2026/4/9</a:t>
+              <a:t>2026/4/15</a:t>
             </a:fld>
             <a:endParaRPr lang="zh-TW" altLang="en-US"/>
           </a:p>
@@ -864,7 +1471,7 @@
           <a:p>
             <a:fld id="{95AEDF69-78C5-4321-AD9F-E50A3E378F73}" type="datetimeFigureOut">
               <a:rPr lang="zh-TW" altLang="en-US" smtClean="0"/>
-              <a:t>2026/4/9</a:t>
+              <a:t>2026/4/15</a:t>
             </a:fld>
             <a:endParaRPr lang="zh-TW" altLang="en-US"/>
           </a:p>
@@ -1139,7 +1746,7 @@
           <a:p>
             <a:fld id="{95AEDF69-78C5-4321-AD9F-E50A3E378F73}" type="datetimeFigureOut">
               <a:rPr lang="zh-TW" altLang="en-US" smtClean="0"/>
-              <a:t>2026/4/9</a:t>
+              <a:t>2026/4/15</a:t>
             </a:fld>
             <a:endParaRPr lang="zh-TW" altLang="en-US"/>
           </a:p>
@@ -1404,7 +2011,7 @@
           <a:p>
             <a:fld id="{95AEDF69-78C5-4321-AD9F-E50A3E378F73}" type="datetimeFigureOut">
               <a:rPr lang="zh-TW" altLang="en-US" smtClean="0"/>
-              <a:t>2026/4/9</a:t>
+              <a:t>2026/4/15</a:t>
             </a:fld>
             <a:endParaRPr lang="zh-TW" altLang="en-US"/>
           </a:p>
@@ -1816,7 +2423,7 @@
           <a:p>
             <a:fld id="{95AEDF69-78C5-4321-AD9F-E50A3E378F73}" type="datetimeFigureOut">
               <a:rPr lang="zh-TW" altLang="en-US" smtClean="0"/>
-              <a:t>2026/4/9</a:t>
+              <a:t>2026/4/15</a:t>
             </a:fld>
             <a:endParaRPr lang="zh-TW" altLang="en-US"/>
           </a:p>
@@ -1957,7 +2564,7 @@
           <a:p>
             <a:fld id="{95AEDF69-78C5-4321-AD9F-E50A3E378F73}" type="datetimeFigureOut">
               <a:rPr lang="zh-TW" altLang="en-US" smtClean="0"/>
-              <a:t>2026/4/9</a:t>
+              <a:t>2026/4/15</a:t>
             </a:fld>
             <a:endParaRPr lang="zh-TW" altLang="en-US"/>
           </a:p>
@@ -2070,7 +2677,7 @@
           <a:p>
             <a:fld id="{95AEDF69-78C5-4321-AD9F-E50A3E378F73}" type="datetimeFigureOut">
               <a:rPr lang="zh-TW" altLang="en-US" smtClean="0"/>
-              <a:t>2026/4/9</a:t>
+              <a:t>2026/4/15</a:t>
             </a:fld>
             <a:endParaRPr lang="zh-TW" altLang="en-US"/>
           </a:p>
@@ -2381,7 +2988,7 @@
           <a:p>
             <a:fld id="{95AEDF69-78C5-4321-AD9F-E50A3E378F73}" type="datetimeFigureOut">
               <a:rPr lang="zh-TW" altLang="en-US" smtClean="0"/>
-              <a:t>2026/4/9</a:t>
+              <a:t>2026/4/15</a:t>
             </a:fld>
             <a:endParaRPr lang="zh-TW" altLang="en-US"/>
           </a:p>
@@ -2669,7 +3276,7 @@
           <a:p>
             <a:fld id="{95AEDF69-78C5-4321-AD9F-E50A3E378F73}" type="datetimeFigureOut">
               <a:rPr lang="zh-TW" altLang="en-US" smtClean="0"/>
-              <a:t>2026/4/9</a:t>
+              <a:t>2026/4/15</a:t>
             </a:fld>
             <a:endParaRPr lang="zh-TW" altLang="en-US"/>
           </a:p>
@@ -2910,7 +3517,7 @@
           <a:p>
             <a:fld id="{95AEDF69-78C5-4321-AD9F-E50A3E378F73}" type="datetimeFigureOut">
               <a:rPr lang="zh-TW" altLang="en-US" smtClean="0"/>
-              <a:t>2026/4/9</a:t>
+              <a:t>2026/4/15</a:t>
             </a:fld>
             <a:endParaRPr lang="zh-TW" altLang="en-US"/>
           </a:p>
@@ -3387,13 +3994,13 @@
   <p:clrMapOvr>
     <a:masterClrMapping/>
   </p:clrMapOvr>
-  <mc:AlternateContent xmlns:mc="http://schemas.openxmlformats.org/markup-compatibility/2006" xmlns:p14="http://schemas.microsoft.com/office/powerpoint/2010/main">
-    <mc:Choice Requires="p14">
+  <mc:AlternateContent xmlns:mc="http://schemas.openxmlformats.org/markup-compatibility/2006">
+    <mc:Choice xmlns:p14="http://schemas.microsoft.com/office/powerpoint/2010/main" Requires="p14">
       <p:transition spd="slow" p14:dur="2000">
         <p:cut/>
       </p:transition>
     </mc:Choice>
-    <mc:Fallback xmlns="">
+    <mc:Fallback>
       <p:transition spd="slow">
         <p:cut/>
       </p:transition>
@@ -3437,7 +4044,7 @@
         </p:nvSpPr>
         <p:spPr>
           <a:xfrm>
-            <a:off x="10741" y="-97454"/>
+            <a:off x="0" y="-1325563"/>
             <a:ext cx="12301332" cy="1325563"/>
           </a:xfrm>
         </p:spPr>
@@ -3455,10 +4062,1092 @@
       </p:sp>
       <p:pic>
         <p:nvPicPr>
+          <p:cNvPr id="4" name="圖片 3">
+            <a:extLst>
+              <a:ext uri="{FF2B5EF4-FFF2-40B4-BE49-F238E27FC236}">
+                <a16:creationId xmlns:a16="http://schemas.microsoft.com/office/drawing/2014/main" id="{C1F960D7-ABAE-8552-6CEA-E586032AB6FB}"/>
+              </a:ext>
+            </a:extLst>
+          </p:cNvPr>
+          <p:cNvPicPr>
+            <a:picLocks noChangeAspect="1"/>
+          </p:cNvPicPr>
+          <p:nvPr/>
+        </p:nvPicPr>
+        <p:blipFill>
+          <a:blip r:embed="rId3"/>
+          <a:stretch>
+            <a:fillRect/>
+          </a:stretch>
+        </p:blipFill>
+        <p:spPr>
+          <a:xfrm>
+            <a:off x="1764631" y="0"/>
+            <a:ext cx="8662737" cy="6858000"/>
+          </a:xfrm>
+          <a:prstGeom prst="rect">
+            <a:avLst/>
+          </a:prstGeom>
+        </p:spPr>
+      </p:pic>
+      <mc:AlternateContent xmlns:mc="http://schemas.openxmlformats.org/markup-compatibility/2006">
+        <mc:Choice xmlns:a14="http://schemas.microsoft.com/office/drawing/2010/main" Requires="a14">
+          <p:sp>
+            <p:nvSpPr>
+              <p:cNvPr id="5" name="標題 1">
+                <a:extLst>
+                  <a:ext uri="{FF2B5EF4-FFF2-40B4-BE49-F238E27FC236}">
+                    <a16:creationId xmlns:a16="http://schemas.microsoft.com/office/drawing/2014/main" id="{8EA49A12-E058-9C5D-D1EF-F61467BD927F}"/>
+                  </a:ext>
+                </a:extLst>
+              </p:cNvPr>
+              <p:cNvSpPr txBox="1">
+                <a:spLocks/>
+              </p:cNvSpPr>
+              <p:nvPr/>
+            </p:nvSpPr>
+            <p:spPr>
+              <a:xfrm>
+                <a:off x="7758545" y="0"/>
+                <a:ext cx="1157659" cy="1136073"/>
+              </a:xfrm>
+              <a:prstGeom prst="rect">
+                <a:avLst/>
+              </a:prstGeom>
+            </p:spPr>
+            <p:txBody>
+              <a:bodyPr vert="horz" lIns="91440" tIns="45720" rIns="91440" bIns="45720" rtlCol="0" anchor="ctr">
+                <a:normAutofit/>
+              </a:bodyPr>
+              <a:lstStyle>
+                <a:lvl1pPr algn="l" defTabSz="914400" rtl="0" eaLnBrk="1" latinLnBrk="0" hangingPunct="1">
+                  <a:lnSpc>
+                    <a:spcPct val="90000"/>
+                  </a:lnSpc>
+                  <a:spcBef>
+                    <a:spcPct val="0"/>
+                  </a:spcBef>
+                  <a:buNone/>
+                  <a:defRPr sz="4400" kern="1200">
+                    <a:solidFill>
+                      <a:schemeClr val="tx1"/>
+                    </a:solidFill>
+                    <a:latin typeface="+mj-lt"/>
+                    <a:ea typeface="+mj-ea"/>
+                    <a:cs typeface="+mj-cs"/>
+                  </a:defRPr>
+                </a:lvl1pPr>
+              </a:lstStyle>
+              <a:p>
+                <a14:m>
+                  <m:oMathPara xmlns:m="http://schemas.openxmlformats.org/officeDocument/2006/math">
+                    <m:oMathParaPr>
+                      <m:jc m:val="centerGroup"/>
+                    </m:oMathParaPr>
+                    <m:oMath xmlns:m="http://schemas.openxmlformats.org/officeDocument/2006/math">
+                      <m:r>
+                        <a:rPr lang="en-US" altLang="zh-TW" sz="2400" b="0" i="1" smtClean="0">
+                          <a:latin typeface="Cambria Math" panose="02040503050406030204" pitchFamily="18" charset="0"/>
+                        </a:rPr>
+                        <m:t>𝑅</m:t>
+                      </m:r>
+                    </m:oMath>
+                  </m:oMathPara>
+                </a14:m>
+                <a:endParaRPr lang="zh-TW" altLang="en-US" sz="2400"/>
+              </a:p>
+            </p:txBody>
+          </p:sp>
+        </mc:Choice>
+        <mc:Fallback>
+          <p:sp>
+            <p:nvSpPr>
+              <p:cNvPr id="5" name="標題 1">
+                <a:extLst>
+                  <a:ext uri="{FF2B5EF4-FFF2-40B4-BE49-F238E27FC236}">
+                    <a16:creationId xmlns:a16="http://schemas.microsoft.com/office/drawing/2014/main" id="{8EA49A12-E058-9C5D-D1EF-F61467BD927F}"/>
+                  </a:ext>
+                </a:extLst>
+              </p:cNvPr>
+              <p:cNvSpPr txBox="1">
+                <a:spLocks noRot="1" noChangeAspect="1" noMove="1" noResize="1" noEditPoints="1" noAdjustHandles="1" noChangeArrowheads="1" noChangeShapeType="1" noTextEdit="1"/>
+              </p:cNvSpPr>
+              <p:nvPr/>
+            </p:nvSpPr>
+            <p:spPr>
+              <a:xfrm>
+                <a:off x="7758545" y="0"/>
+                <a:ext cx="1157659" cy="1136073"/>
+              </a:xfrm>
+              <a:prstGeom prst="rect">
+                <a:avLst/>
+              </a:prstGeom>
+              <a:blipFill>
+                <a:blip r:embed="rId4"/>
+                <a:stretch>
+                  <a:fillRect/>
+                </a:stretch>
+              </a:blipFill>
+            </p:spPr>
+            <p:txBody>
+              <a:bodyPr/>
+              <a:lstStyle/>
+              <a:p>
+                <a:r>
+                  <a:rPr lang="zh-TW" altLang="en-US">
+                    <a:noFill/>
+                  </a:rPr>
+                  <a:t> </a:t>
+                </a:r>
+              </a:p>
+            </p:txBody>
+          </p:sp>
+        </mc:Fallback>
+      </mc:AlternateContent>
+      <mc:AlternateContent xmlns:mc="http://schemas.openxmlformats.org/markup-compatibility/2006">
+        <mc:Choice xmlns:a14="http://schemas.microsoft.com/office/drawing/2010/main" Requires="a14">
+          <p:sp>
+            <p:nvSpPr>
+              <p:cNvPr id="6" name="標題 1">
+                <a:extLst>
+                  <a:ext uri="{FF2B5EF4-FFF2-40B4-BE49-F238E27FC236}">
+                    <a16:creationId xmlns:a16="http://schemas.microsoft.com/office/drawing/2014/main" id="{3A71A946-06EF-49D5-D80F-163418070A5E}"/>
+                  </a:ext>
+                </a:extLst>
+              </p:cNvPr>
+              <p:cNvSpPr txBox="1">
+                <a:spLocks/>
+              </p:cNvSpPr>
+              <p:nvPr/>
+            </p:nvSpPr>
+            <p:spPr>
+              <a:xfrm>
+                <a:off x="8548254" y="1752598"/>
+                <a:ext cx="1157659" cy="1136073"/>
+              </a:xfrm>
+              <a:prstGeom prst="rect">
+                <a:avLst/>
+              </a:prstGeom>
+            </p:spPr>
+            <p:txBody>
+              <a:bodyPr vert="horz" lIns="91440" tIns="45720" rIns="91440" bIns="45720" rtlCol="0" anchor="ctr">
+                <a:normAutofit/>
+              </a:bodyPr>
+              <a:lstStyle>
+                <a:lvl1pPr algn="l" defTabSz="914400" rtl="0" eaLnBrk="1" latinLnBrk="0" hangingPunct="1">
+                  <a:lnSpc>
+                    <a:spcPct val="90000"/>
+                  </a:lnSpc>
+                  <a:spcBef>
+                    <a:spcPct val="0"/>
+                  </a:spcBef>
+                  <a:buNone/>
+                  <a:defRPr sz="4400" kern="1200">
+                    <a:solidFill>
+                      <a:schemeClr val="tx1"/>
+                    </a:solidFill>
+                    <a:latin typeface="+mj-lt"/>
+                    <a:ea typeface="+mj-ea"/>
+                    <a:cs typeface="+mj-cs"/>
+                  </a:defRPr>
+                </a:lvl1pPr>
+              </a:lstStyle>
+              <a:p>
+                <a14:m>
+                  <m:oMathPara xmlns:m="http://schemas.openxmlformats.org/officeDocument/2006/math">
+                    <m:oMathParaPr>
+                      <m:jc m:val="centerGroup"/>
+                    </m:oMathParaPr>
+                    <m:oMath xmlns:m="http://schemas.openxmlformats.org/officeDocument/2006/math">
+                      <m:r>
+                        <a:rPr lang="en-US" altLang="zh-TW" sz="2400" b="0" i="1" smtClean="0">
+                          <a:latin typeface="Cambria Math" panose="02040503050406030204" pitchFamily="18" charset="0"/>
+                        </a:rPr>
+                        <m:t>𝑅</m:t>
+                      </m:r>
+                    </m:oMath>
+                  </m:oMathPara>
+                </a14:m>
+                <a:endParaRPr lang="zh-TW" altLang="en-US" sz="2400"/>
+              </a:p>
+            </p:txBody>
+          </p:sp>
+        </mc:Choice>
+        <mc:Fallback>
+          <p:sp>
+            <p:nvSpPr>
+              <p:cNvPr id="6" name="標題 1">
+                <a:extLst>
+                  <a:ext uri="{FF2B5EF4-FFF2-40B4-BE49-F238E27FC236}">
+                    <a16:creationId xmlns:a16="http://schemas.microsoft.com/office/drawing/2014/main" id="{3A71A946-06EF-49D5-D80F-163418070A5E}"/>
+                  </a:ext>
+                </a:extLst>
+              </p:cNvPr>
+              <p:cNvSpPr txBox="1">
+                <a:spLocks noRot="1" noChangeAspect="1" noMove="1" noResize="1" noEditPoints="1" noAdjustHandles="1" noChangeArrowheads="1" noChangeShapeType="1" noTextEdit="1"/>
+              </p:cNvSpPr>
+              <p:nvPr/>
+            </p:nvSpPr>
+            <p:spPr>
+              <a:xfrm>
+                <a:off x="8548254" y="1752598"/>
+                <a:ext cx="1157659" cy="1136073"/>
+              </a:xfrm>
+              <a:prstGeom prst="rect">
+                <a:avLst/>
+              </a:prstGeom>
+              <a:blipFill>
+                <a:blip r:embed="rId5"/>
+                <a:stretch>
+                  <a:fillRect/>
+                </a:stretch>
+              </a:blipFill>
+            </p:spPr>
+            <p:txBody>
+              <a:bodyPr/>
+              <a:lstStyle/>
+              <a:p>
+                <a:r>
+                  <a:rPr lang="zh-TW" altLang="en-US">
+                    <a:noFill/>
+                  </a:rPr>
+                  <a:t> </a:t>
+                </a:r>
+              </a:p>
+            </p:txBody>
+          </p:sp>
+        </mc:Fallback>
+      </mc:AlternateContent>
+      <mc:AlternateContent xmlns:mc="http://schemas.openxmlformats.org/markup-compatibility/2006">
+        <mc:Choice xmlns:a14="http://schemas.microsoft.com/office/drawing/2010/main" Requires="a14">
+          <p:sp>
+            <p:nvSpPr>
+              <p:cNvPr id="8" name="標題 1">
+                <a:extLst>
+                  <a:ext uri="{FF2B5EF4-FFF2-40B4-BE49-F238E27FC236}">
+                    <a16:creationId xmlns:a16="http://schemas.microsoft.com/office/drawing/2014/main" id="{CAA3FF98-A6B4-6D16-A463-04A4639BDBB6}"/>
+                  </a:ext>
+                </a:extLst>
+              </p:cNvPr>
+              <p:cNvSpPr txBox="1">
+                <a:spLocks/>
+              </p:cNvSpPr>
+              <p:nvPr/>
+            </p:nvSpPr>
+            <p:spPr>
+              <a:xfrm>
+                <a:off x="6190725" y="1724890"/>
+                <a:ext cx="1157659" cy="1136073"/>
+              </a:xfrm>
+              <a:prstGeom prst="rect">
+                <a:avLst/>
+              </a:prstGeom>
+            </p:spPr>
+            <p:txBody>
+              <a:bodyPr vert="horz" lIns="91440" tIns="45720" rIns="91440" bIns="45720" rtlCol="0" anchor="ctr">
+                <a:normAutofit/>
+              </a:bodyPr>
+              <a:lstStyle>
+                <a:lvl1pPr algn="l" defTabSz="914400" rtl="0" eaLnBrk="1" latinLnBrk="0" hangingPunct="1">
+                  <a:lnSpc>
+                    <a:spcPct val="90000"/>
+                  </a:lnSpc>
+                  <a:spcBef>
+                    <a:spcPct val="0"/>
+                  </a:spcBef>
+                  <a:buNone/>
+                  <a:defRPr sz="4400" kern="1200">
+                    <a:solidFill>
+                      <a:schemeClr val="tx1"/>
+                    </a:solidFill>
+                    <a:latin typeface="+mj-lt"/>
+                    <a:ea typeface="+mj-ea"/>
+                    <a:cs typeface="+mj-cs"/>
+                  </a:defRPr>
+                </a:lvl1pPr>
+              </a:lstStyle>
+              <a:p>
+                <a14:m>
+                  <m:oMathPara xmlns:m="http://schemas.openxmlformats.org/officeDocument/2006/math">
+                    <m:oMathParaPr>
+                      <m:jc m:val="centerGroup"/>
+                    </m:oMathParaPr>
+                    <m:oMath xmlns:m="http://schemas.openxmlformats.org/officeDocument/2006/math">
+                      <m:r>
+                        <a:rPr lang="en-US" altLang="zh-TW" sz="2800" b="0" i="1" smtClean="0">
+                          <a:latin typeface="Cambria Math" panose="02040503050406030204" pitchFamily="18" charset="0"/>
+                        </a:rPr>
+                        <m:t>𝑅</m:t>
+                      </m:r>
+                    </m:oMath>
+                  </m:oMathPara>
+                </a14:m>
+                <a:endParaRPr lang="zh-TW" altLang="en-US" sz="2800"/>
+              </a:p>
+            </p:txBody>
+          </p:sp>
+        </mc:Choice>
+        <mc:Fallback>
+          <p:sp>
+            <p:nvSpPr>
+              <p:cNvPr id="8" name="標題 1">
+                <a:extLst>
+                  <a:ext uri="{FF2B5EF4-FFF2-40B4-BE49-F238E27FC236}">
+                    <a16:creationId xmlns:a16="http://schemas.microsoft.com/office/drawing/2014/main" id="{CAA3FF98-A6B4-6D16-A463-04A4639BDBB6}"/>
+                  </a:ext>
+                </a:extLst>
+              </p:cNvPr>
+              <p:cNvSpPr txBox="1">
+                <a:spLocks noRot="1" noChangeAspect="1" noMove="1" noResize="1" noEditPoints="1" noAdjustHandles="1" noChangeArrowheads="1" noChangeShapeType="1" noTextEdit="1"/>
+              </p:cNvSpPr>
+              <p:nvPr/>
+            </p:nvSpPr>
+            <p:spPr>
+              <a:xfrm>
+                <a:off x="6190725" y="1724890"/>
+                <a:ext cx="1157659" cy="1136073"/>
+              </a:xfrm>
+              <a:prstGeom prst="rect">
+                <a:avLst/>
+              </a:prstGeom>
+              <a:blipFill>
+                <a:blip r:embed="rId6"/>
+                <a:stretch>
+                  <a:fillRect/>
+                </a:stretch>
+              </a:blipFill>
+            </p:spPr>
+            <p:txBody>
+              <a:bodyPr/>
+              <a:lstStyle/>
+              <a:p>
+                <a:r>
+                  <a:rPr lang="zh-TW" altLang="en-US">
+                    <a:noFill/>
+                  </a:rPr>
+                  <a:t> </a:t>
+                </a:r>
+              </a:p>
+            </p:txBody>
+          </p:sp>
+        </mc:Fallback>
+      </mc:AlternateContent>
+      <p:pic>
+        <p:nvPicPr>
+          <p:cNvPr id="11" name="圖片 10">
+            <a:extLst>
+              <a:ext uri="{FF2B5EF4-FFF2-40B4-BE49-F238E27FC236}">
+                <a16:creationId xmlns:a16="http://schemas.microsoft.com/office/drawing/2014/main" id="{373E0208-5C99-BE3D-8D52-EA0458411A6E}"/>
+              </a:ext>
+            </a:extLst>
+          </p:cNvPr>
+          <p:cNvPicPr>
+            <a:picLocks noChangeAspect="1"/>
+          </p:cNvPicPr>
+          <p:nvPr/>
+        </p:nvPicPr>
+        <p:blipFill>
+          <a:blip r:embed="rId7"/>
+          <a:stretch>
+            <a:fillRect/>
+          </a:stretch>
+        </p:blipFill>
+        <p:spPr>
+          <a:xfrm>
+            <a:off x="5068111" y="5772727"/>
+            <a:ext cx="307453" cy="511098"/>
+          </a:xfrm>
+          <a:prstGeom prst="rect">
+            <a:avLst/>
+          </a:prstGeom>
+        </p:spPr>
+      </p:pic>
+      <mc:AlternateContent xmlns:mc="http://schemas.openxmlformats.org/markup-compatibility/2006">
+        <mc:Choice xmlns:a14="http://schemas.microsoft.com/office/drawing/2010/main" Requires="a14">
+          <p:sp>
+            <p:nvSpPr>
+              <p:cNvPr id="9" name="標題 1">
+                <a:extLst>
+                  <a:ext uri="{FF2B5EF4-FFF2-40B4-BE49-F238E27FC236}">
+                    <a16:creationId xmlns:a16="http://schemas.microsoft.com/office/drawing/2014/main" id="{189CD8F1-7932-0AB8-9D38-DCD2CF7CA130}"/>
+                  </a:ext>
+                </a:extLst>
+              </p:cNvPr>
+              <p:cNvSpPr txBox="1">
+                <a:spLocks/>
+              </p:cNvSpPr>
+              <p:nvPr/>
+            </p:nvSpPr>
+            <p:spPr>
+              <a:xfrm>
+                <a:off x="4670715" y="5559530"/>
+                <a:ext cx="1157659" cy="1136073"/>
+              </a:xfrm>
+              <a:prstGeom prst="rect">
+                <a:avLst/>
+              </a:prstGeom>
+            </p:spPr>
+            <p:txBody>
+              <a:bodyPr vert="horz" lIns="91440" tIns="45720" rIns="91440" bIns="45720" rtlCol="0" anchor="ctr">
+                <a:normAutofit/>
+              </a:bodyPr>
+              <a:lstStyle>
+                <a:lvl1pPr algn="l" defTabSz="914400" rtl="0" eaLnBrk="1" latinLnBrk="0" hangingPunct="1">
+                  <a:lnSpc>
+                    <a:spcPct val="90000"/>
+                  </a:lnSpc>
+                  <a:spcBef>
+                    <a:spcPct val="0"/>
+                  </a:spcBef>
+                  <a:buNone/>
+                  <a:defRPr sz="4400" kern="1200">
+                    <a:solidFill>
+                      <a:schemeClr val="tx1"/>
+                    </a:solidFill>
+                    <a:latin typeface="+mj-lt"/>
+                    <a:ea typeface="+mj-ea"/>
+                    <a:cs typeface="+mj-cs"/>
+                  </a:defRPr>
+                </a:lvl1pPr>
+              </a:lstStyle>
+              <a:p>
+                <a14:m>
+                  <m:oMathPara xmlns:m="http://schemas.openxmlformats.org/officeDocument/2006/math">
+                    <m:oMathParaPr>
+                      <m:jc m:val="centerGroup"/>
+                    </m:oMathParaPr>
+                    <m:oMath xmlns:m="http://schemas.openxmlformats.org/officeDocument/2006/math">
+                      <m:sSup>
+                        <m:sSupPr>
+                          <m:ctrlPr>
+                            <a:rPr lang="en-US" altLang="zh-TW" sz="2000" b="0" i="1" smtClean="0">
+                              <a:latin typeface="Cambria Math" panose="02040503050406030204" pitchFamily="18" charset="0"/>
+                            </a:rPr>
+                          </m:ctrlPr>
+                        </m:sSupPr>
+                        <m:e>
+                          <m:r>
+                            <a:rPr lang="en-US" altLang="zh-TW" sz="2000" b="0" i="1" smtClean="0">
+                              <a:latin typeface="Cambria Math" panose="02040503050406030204" pitchFamily="18" charset="0"/>
+                            </a:rPr>
+                            <m:t>𝑅</m:t>
+                          </m:r>
+                        </m:e>
+                        <m:sup>
+                          <m:r>
+                            <a:rPr lang="en-US" altLang="zh-TW" sz="2000" b="0" i="1" smtClean="0">
+                              <a:latin typeface="Cambria Math" panose="02040503050406030204" pitchFamily="18" charset="0"/>
+                            </a:rPr>
+                            <m:t>2</m:t>
+                          </m:r>
+                        </m:sup>
+                      </m:sSup>
+                    </m:oMath>
+                  </m:oMathPara>
+                </a14:m>
+                <a:endParaRPr lang="zh-TW" altLang="en-US" sz="2000"/>
+              </a:p>
+            </p:txBody>
+          </p:sp>
+        </mc:Choice>
+        <mc:Fallback>
+          <p:sp>
+            <p:nvSpPr>
+              <p:cNvPr id="9" name="標題 1">
+                <a:extLst>
+                  <a:ext uri="{FF2B5EF4-FFF2-40B4-BE49-F238E27FC236}">
+                    <a16:creationId xmlns:a16="http://schemas.microsoft.com/office/drawing/2014/main" id="{189CD8F1-7932-0AB8-9D38-DCD2CF7CA130}"/>
+                  </a:ext>
+                </a:extLst>
+              </p:cNvPr>
+              <p:cNvSpPr txBox="1">
+                <a:spLocks noRot="1" noChangeAspect="1" noMove="1" noResize="1" noEditPoints="1" noAdjustHandles="1" noChangeArrowheads="1" noChangeShapeType="1" noTextEdit="1"/>
+              </p:cNvSpPr>
+              <p:nvPr/>
+            </p:nvSpPr>
+            <p:spPr>
+              <a:xfrm>
+                <a:off x="4670715" y="5559530"/>
+                <a:ext cx="1157659" cy="1136073"/>
+              </a:xfrm>
+              <a:prstGeom prst="rect">
+                <a:avLst/>
+              </a:prstGeom>
+              <a:blipFill>
+                <a:blip r:embed="rId8"/>
+                <a:stretch>
+                  <a:fillRect/>
+                </a:stretch>
+              </a:blipFill>
+            </p:spPr>
+            <p:txBody>
+              <a:bodyPr/>
+              <a:lstStyle/>
+              <a:p>
+                <a:r>
+                  <a:rPr lang="zh-TW" altLang="en-US">
+                    <a:noFill/>
+                  </a:rPr>
+                  <a:t> </a:t>
+                </a:r>
+              </a:p>
+            </p:txBody>
+          </p:sp>
+        </mc:Fallback>
+      </mc:AlternateContent>
+      <mc:AlternateContent xmlns:mc="http://schemas.openxmlformats.org/markup-compatibility/2006">
+        <mc:Choice xmlns:a14="http://schemas.microsoft.com/office/drawing/2010/main" Requires="a14">
+          <p:sp>
+            <p:nvSpPr>
+              <p:cNvPr id="16" name="標題 1">
+                <a:extLst>
+                  <a:ext uri="{FF2B5EF4-FFF2-40B4-BE49-F238E27FC236}">
+                    <a16:creationId xmlns:a16="http://schemas.microsoft.com/office/drawing/2014/main" id="{88C12DAD-5782-9613-6B79-42B9A034E8BE}"/>
+                  </a:ext>
+                </a:extLst>
+              </p:cNvPr>
+              <p:cNvSpPr txBox="1">
+                <a:spLocks/>
+              </p:cNvSpPr>
+              <p:nvPr/>
+            </p:nvSpPr>
+            <p:spPr>
+              <a:xfrm>
+                <a:off x="2017231" y="2570016"/>
+                <a:ext cx="1437169" cy="1136073"/>
+              </a:xfrm>
+              <a:prstGeom prst="rect">
+                <a:avLst/>
+              </a:prstGeom>
+            </p:spPr>
+            <p:txBody>
+              <a:bodyPr vert="horz" lIns="91440" tIns="45720" rIns="91440" bIns="45720" rtlCol="0" anchor="ctr">
+                <a:normAutofit/>
+              </a:bodyPr>
+              <a:lstStyle>
+                <a:lvl1pPr algn="l" defTabSz="914400" rtl="0" eaLnBrk="1" latinLnBrk="0" hangingPunct="1">
+                  <a:lnSpc>
+                    <a:spcPct val="90000"/>
+                  </a:lnSpc>
+                  <a:spcBef>
+                    <a:spcPct val="0"/>
+                  </a:spcBef>
+                  <a:buNone/>
+                  <a:defRPr sz="4400" kern="1200">
+                    <a:solidFill>
+                      <a:schemeClr val="tx1"/>
+                    </a:solidFill>
+                    <a:latin typeface="+mj-lt"/>
+                    <a:ea typeface="+mj-ea"/>
+                    <a:cs typeface="+mj-cs"/>
+                  </a:defRPr>
+                </a:lvl1pPr>
+              </a:lstStyle>
+              <a:p>
+                <a:r>
+                  <a:rPr lang="zh-TW" altLang="en-US" sz="2400"/>
+                  <a:t> </a:t>
+                </a:r>
+                <a14:m>
+                  <m:oMath xmlns:m="http://schemas.openxmlformats.org/officeDocument/2006/math">
+                    <m:r>
+                      <a:rPr lang="zh-TW" altLang="en-US" sz="2400" i="1">
+                        <a:latin typeface="Cambria Math" panose="02040503050406030204" pitchFamily="18" charset="0"/>
+                      </a:rPr>
+                      <m:t> </m:t>
+                    </m:r>
+                    <m:r>
+                      <a:rPr lang="zh-TW" altLang="en-US" sz="2400" i="1" smtClean="0">
+                        <a:latin typeface="Cambria Math" panose="02040503050406030204" pitchFamily="18" charset="0"/>
+                      </a:rPr>
+                      <m:t> </m:t>
+                    </m:r>
+                    <m:r>
+                      <a:rPr lang="en-US" altLang="zh-TW" sz="2400" i="1" smtClean="0">
+                        <a:latin typeface="Cambria Math" panose="02040503050406030204" pitchFamily="18" charset="0"/>
+                      </a:rPr>
+                      <m:t>𝛼</m:t>
+                    </m:r>
+                  </m:oMath>
+                </a14:m>
+                <a:r>
+                  <a:rPr lang="zh-TW" altLang="en-US" sz="2400"/>
+                  <a:t> 粒子</a:t>
+                </a:r>
+              </a:p>
+            </p:txBody>
+          </p:sp>
+        </mc:Choice>
+        <mc:Fallback>
+          <p:sp>
+            <p:nvSpPr>
+              <p:cNvPr id="16" name="標題 1">
+                <a:extLst>
+                  <a:ext uri="{FF2B5EF4-FFF2-40B4-BE49-F238E27FC236}">
+                    <a16:creationId xmlns:a16="http://schemas.microsoft.com/office/drawing/2014/main" id="{88C12DAD-5782-9613-6B79-42B9A034E8BE}"/>
+                  </a:ext>
+                </a:extLst>
+              </p:cNvPr>
+              <p:cNvSpPr txBox="1">
+                <a:spLocks noRot="1" noChangeAspect="1" noMove="1" noResize="1" noEditPoints="1" noAdjustHandles="1" noChangeArrowheads="1" noChangeShapeType="1" noTextEdit="1"/>
+              </p:cNvSpPr>
+              <p:nvPr/>
+            </p:nvSpPr>
+            <p:spPr>
+              <a:xfrm>
+                <a:off x="2017231" y="2570016"/>
+                <a:ext cx="1437169" cy="1136073"/>
+              </a:xfrm>
+              <a:prstGeom prst="rect">
+                <a:avLst/>
+              </a:prstGeom>
+              <a:blipFill>
+                <a:blip r:embed="rId9"/>
+                <a:stretch>
+                  <a:fillRect/>
+                </a:stretch>
+              </a:blipFill>
+            </p:spPr>
+            <p:txBody>
+              <a:bodyPr/>
+              <a:lstStyle/>
+              <a:p>
+                <a:r>
+                  <a:rPr lang="zh-TW" altLang="en-US">
+                    <a:noFill/>
+                  </a:rPr>
+                  <a:t> </a:t>
+                </a:r>
+              </a:p>
+            </p:txBody>
+          </p:sp>
+        </mc:Fallback>
+      </mc:AlternateContent>
+    </p:spTree>
+    <p:extLst>
+      <p:ext uri="{BB962C8B-B14F-4D97-AF65-F5344CB8AC3E}">
+        <p14:creationId xmlns:p14="http://schemas.microsoft.com/office/powerpoint/2010/main" val="1163858083"/>
+      </p:ext>
+    </p:extLst>
+  </p:cSld>
+  <p:clrMapOvr>
+    <a:masterClrMapping/>
+  </p:clrMapOvr>
+  <mc:AlternateContent xmlns:mc="http://schemas.openxmlformats.org/markup-compatibility/2006">
+    <mc:Choice xmlns:p14="http://schemas.microsoft.com/office/powerpoint/2010/main" Requires="p14">
+      <p:transition spd="slow" p14:dur="2000">
+        <p:cut/>
+      </p:transition>
+    </mc:Choice>
+    <mc:Fallback>
+      <p:transition spd="slow">
+        <p:cut/>
+      </p:transition>
+    </mc:Fallback>
+  </mc:AlternateContent>
+</p:sld>
+</file>
+
+<file path=ppt/slides/slide3.xml><?xml version="1.0" encoding="utf-8"?>
+<p:sld xmlns:a="http://schemas.openxmlformats.org/drawingml/2006/main" xmlns:r="http://schemas.openxmlformats.org/officeDocument/2006/relationships" xmlns:p="http://schemas.openxmlformats.org/presentationml/2006/main">
+  <p:cSld>
+    <p:spTree>
+      <p:nvGrpSpPr>
+        <p:cNvPr id="1" name=""/>
+        <p:cNvGrpSpPr/>
+        <p:nvPr/>
+      </p:nvGrpSpPr>
+      <p:grpSpPr>
+        <a:xfrm>
+          <a:off x="0" y="0"/>
+          <a:ext cx="0" cy="0"/>
+          <a:chOff x="0" y="0"/>
+          <a:chExt cx="0" cy="0"/>
+        </a:xfrm>
+      </p:grpSpPr>
+      <p:sp>
+        <p:nvSpPr>
+          <p:cNvPr id="2" name="標題 1">
+            <a:extLst>
+              <a:ext uri="{FF2B5EF4-FFF2-40B4-BE49-F238E27FC236}">
+                <a16:creationId xmlns:a16="http://schemas.microsoft.com/office/drawing/2014/main" id="{3FDDBB72-A6E6-DDCC-2A52-B28C6C53C8CD}"/>
+              </a:ext>
+            </a:extLst>
+          </p:cNvPr>
+          <p:cNvSpPr>
+            <a:spLocks noGrp="1"/>
+          </p:cNvSpPr>
+          <p:nvPr>
+            <p:ph type="title"/>
+          </p:nvPr>
+        </p:nvSpPr>
+        <p:spPr/>
+        <p:txBody>
+          <a:bodyPr/>
+          <a:lstStyle/>
+          <a:p>
+            <a:endParaRPr lang="zh-TW" altLang="en-US"/>
+          </a:p>
+        </p:txBody>
+      </p:sp>
+      <p:sp>
+        <p:nvSpPr>
+          <p:cNvPr id="3" name="內容版面配置區 2">
+            <a:extLst>
+              <a:ext uri="{FF2B5EF4-FFF2-40B4-BE49-F238E27FC236}">
+                <a16:creationId xmlns:a16="http://schemas.microsoft.com/office/drawing/2014/main" id="{863DA0E5-47A1-FB47-9C6E-8189375E29A7}"/>
+              </a:ext>
+            </a:extLst>
+          </p:cNvPr>
+          <p:cNvSpPr>
+            <a:spLocks noGrp="1"/>
+          </p:cNvSpPr>
+          <p:nvPr>
+            <p:ph idx="1"/>
+          </p:nvPr>
+        </p:nvSpPr>
+        <p:spPr/>
+        <p:txBody>
+          <a:bodyPr/>
+          <a:lstStyle/>
+          <a:p>
+            <a:endParaRPr lang="zh-TW" altLang="en-US"/>
+          </a:p>
+        </p:txBody>
+      </p:sp>
+      <p:pic>
+        <p:nvPicPr>
+          <p:cNvPr id="5" name="圖片 4">
+            <a:extLst>
+              <a:ext uri="{FF2B5EF4-FFF2-40B4-BE49-F238E27FC236}">
+                <a16:creationId xmlns:a16="http://schemas.microsoft.com/office/drawing/2014/main" id="{A5163447-1FA8-6D83-318A-0798C6B183C3}"/>
+              </a:ext>
+            </a:extLst>
+          </p:cNvPr>
+          <p:cNvPicPr>
+            <a:picLocks noChangeAspect="1"/>
+          </p:cNvPicPr>
+          <p:nvPr/>
+        </p:nvPicPr>
+        <p:blipFill>
+          <a:blip r:embed="rId3"/>
+          <a:stretch>
+            <a:fillRect/>
+          </a:stretch>
+        </p:blipFill>
+        <p:spPr>
+          <a:xfrm>
+            <a:off x="112745" y="0"/>
+            <a:ext cx="11966510" cy="6858000"/>
+          </a:xfrm>
+          <a:prstGeom prst="rect">
+            <a:avLst/>
+          </a:prstGeom>
+        </p:spPr>
+      </p:pic>
+      <p:pic>
+        <p:nvPicPr>
           <p:cNvPr id="7" name="圖片 6">
             <a:extLst>
               <a:ext uri="{FF2B5EF4-FFF2-40B4-BE49-F238E27FC236}">
-                <a16:creationId xmlns:a16="http://schemas.microsoft.com/office/drawing/2014/main" id="{3DD9F199-E7B3-8996-F338-C3E67E4798C8}"/>
+                <a16:creationId xmlns:a16="http://schemas.microsoft.com/office/drawing/2014/main" id="{1506FB11-6473-CEE8-1BF5-F4241066CCB1}"/>
+              </a:ext>
+            </a:extLst>
+          </p:cNvPr>
+          <p:cNvPicPr>
+            <a:picLocks noChangeAspect="1"/>
+          </p:cNvPicPr>
+          <p:nvPr/>
+        </p:nvPicPr>
+        <p:blipFill>
+          <a:blip r:embed="rId4"/>
+          <a:srcRect l="8783"/>
+          <a:stretch>
+            <a:fillRect/>
+          </a:stretch>
+        </p:blipFill>
+        <p:spPr>
+          <a:xfrm>
+            <a:off x="1163781" y="0"/>
+            <a:ext cx="10915473" cy="6858000"/>
+          </a:xfrm>
+          <a:prstGeom prst="rect">
+            <a:avLst/>
+          </a:prstGeom>
+        </p:spPr>
+      </p:pic>
+      <p:pic>
+        <p:nvPicPr>
+          <p:cNvPr id="9" name="圖片 8">
+            <a:extLst>
+              <a:ext uri="{FF2B5EF4-FFF2-40B4-BE49-F238E27FC236}">
+                <a16:creationId xmlns:a16="http://schemas.microsoft.com/office/drawing/2014/main" id="{B00C5E9B-C8EE-E394-9984-DFACCFD8E0FD}"/>
+              </a:ext>
+            </a:extLst>
+          </p:cNvPr>
+          <p:cNvPicPr>
+            <a:picLocks noChangeAspect="1"/>
+          </p:cNvPicPr>
+          <p:nvPr/>
+        </p:nvPicPr>
+        <p:blipFill>
+          <a:blip r:embed="rId5"/>
+          <a:stretch>
+            <a:fillRect/>
+          </a:stretch>
+        </p:blipFill>
+        <p:spPr>
+          <a:xfrm>
+            <a:off x="0" y="0"/>
+            <a:ext cx="12192000" cy="6858000"/>
+          </a:xfrm>
+          <a:prstGeom prst="rect">
+            <a:avLst/>
+          </a:prstGeom>
+        </p:spPr>
+      </p:pic>
+      <p:pic>
+        <p:nvPicPr>
+          <p:cNvPr id="11" name="圖片 10">
+            <a:extLst>
+              <a:ext uri="{FF2B5EF4-FFF2-40B4-BE49-F238E27FC236}">
+                <a16:creationId xmlns:a16="http://schemas.microsoft.com/office/drawing/2014/main" id="{C9C41F85-8550-F787-6A59-5065B2E1B348}"/>
+              </a:ext>
+            </a:extLst>
+          </p:cNvPr>
+          <p:cNvPicPr>
+            <a:picLocks noChangeAspect="1"/>
+          </p:cNvPicPr>
+          <p:nvPr/>
+        </p:nvPicPr>
+        <p:blipFill>
+          <a:blip r:embed="rId6"/>
+          <a:stretch>
+            <a:fillRect/>
+          </a:stretch>
+        </p:blipFill>
+        <p:spPr>
+          <a:xfrm>
+            <a:off x="0" y="0"/>
+            <a:ext cx="12192000" cy="6858000"/>
+          </a:xfrm>
+          <a:prstGeom prst="rect">
+            <a:avLst/>
+          </a:prstGeom>
+        </p:spPr>
+      </p:pic>
+      <mc:AlternateContent xmlns:mc="http://schemas.openxmlformats.org/markup-compatibility/2006">
+        <mc:Choice xmlns:a14="http://schemas.microsoft.com/office/drawing/2010/main" Requires="a14">
+          <p:sp>
+            <p:nvSpPr>
+              <p:cNvPr id="12" name="標題 1">
+                <a:extLst>
+                  <a:ext uri="{FF2B5EF4-FFF2-40B4-BE49-F238E27FC236}">
+                    <a16:creationId xmlns:a16="http://schemas.microsoft.com/office/drawing/2014/main" id="{A33ED3D3-9214-4E88-198D-18D0C55D32BC}"/>
+                  </a:ext>
+                </a:extLst>
+              </p:cNvPr>
+              <p:cNvSpPr txBox="1">
+                <a:spLocks/>
+              </p:cNvSpPr>
+              <p:nvPr/>
+            </p:nvSpPr>
+            <p:spPr>
+              <a:xfrm>
+                <a:off x="6234545" y="4110182"/>
+                <a:ext cx="1157659" cy="1136073"/>
+              </a:xfrm>
+              <a:prstGeom prst="rect">
+                <a:avLst/>
+              </a:prstGeom>
+            </p:spPr>
+            <p:txBody>
+              <a:bodyPr vert="horz" lIns="91440" tIns="45720" rIns="91440" bIns="45720" rtlCol="0" anchor="ctr">
+                <a:normAutofit/>
+              </a:bodyPr>
+              <a:lstStyle>
+                <a:lvl1pPr algn="l" defTabSz="914400" rtl="0" eaLnBrk="1" latinLnBrk="0" hangingPunct="1">
+                  <a:lnSpc>
+                    <a:spcPct val="90000"/>
+                  </a:lnSpc>
+                  <a:spcBef>
+                    <a:spcPct val="0"/>
+                  </a:spcBef>
+                  <a:buNone/>
+                  <a:defRPr sz="4400" kern="1200">
+                    <a:solidFill>
+                      <a:schemeClr val="tx1"/>
+                    </a:solidFill>
+                    <a:latin typeface="+mj-lt"/>
+                    <a:ea typeface="+mj-ea"/>
+                    <a:cs typeface="+mj-cs"/>
+                  </a:defRPr>
+                </a:lvl1pPr>
+              </a:lstStyle>
+              <a:p>
+                <a14:m>
+                  <m:oMathPara xmlns:m="http://schemas.openxmlformats.org/officeDocument/2006/math">
+                    <m:oMathParaPr>
+                      <m:jc m:val="centerGroup"/>
+                    </m:oMathParaPr>
+                    <m:oMath xmlns:m="http://schemas.openxmlformats.org/officeDocument/2006/math">
+                      <m:r>
+                        <a:rPr lang="en-US" altLang="zh-TW" sz="2400" i="1" smtClean="0">
+                          <a:latin typeface="Cambria Math" panose="02040503050406030204" pitchFamily="18" charset="0"/>
+                        </a:rPr>
+                        <m:t>𝜃</m:t>
+                      </m:r>
+                    </m:oMath>
+                  </m:oMathPara>
+                </a14:m>
+                <a:endParaRPr lang="zh-TW" altLang="en-US" sz="2400"/>
+              </a:p>
+            </p:txBody>
+          </p:sp>
+        </mc:Choice>
+        <mc:Fallback>
+          <p:sp>
+            <p:nvSpPr>
+              <p:cNvPr id="12" name="標題 1">
+                <a:extLst>
+                  <a:ext uri="{FF2B5EF4-FFF2-40B4-BE49-F238E27FC236}">
+                    <a16:creationId xmlns:a16="http://schemas.microsoft.com/office/drawing/2014/main" id="{A33ED3D3-9214-4E88-198D-18D0C55D32BC}"/>
+                  </a:ext>
+                </a:extLst>
+              </p:cNvPr>
+              <p:cNvSpPr txBox="1">
+                <a:spLocks noRot="1" noChangeAspect="1" noMove="1" noResize="1" noEditPoints="1" noAdjustHandles="1" noChangeArrowheads="1" noChangeShapeType="1" noTextEdit="1"/>
+              </p:cNvSpPr>
+              <p:nvPr/>
+            </p:nvSpPr>
+            <p:spPr>
+              <a:xfrm>
+                <a:off x="6234545" y="4110182"/>
+                <a:ext cx="1157659" cy="1136073"/>
+              </a:xfrm>
+              <a:prstGeom prst="rect">
+                <a:avLst/>
+              </a:prstGeom>
+              <a:blipFill>
+                <a:blip r:embed="rId7"/>
+                <a:stretch>
+                  <a:fillRect/>
+                </a:stretch>
+              </a:blipFill>
+            </p:spPr>
+            <p:txBody>
+              <a:bodyPr/>
+              <a:lstStyle/>
+              <a:p>
+                <a:r>
+                  <a:rPr lang="zh-TW" altLang="en-US">
+                    <a:noFill/>
+                  </a:rPr>
+                  <a:t> </a:t>
+                </a:r>
+              </a:p>
+            </p:txBody>
+          </p:sp>
+        </mc:Fallback>
+      </mc:AlternateContent>
+    </p:spTree>
+    <p:extLst>
+      <p:ext uri="{BB962C8B-B14F-4D97-AF65-F5344CB8AC3E}">
+        <p14:creationId xmlns:p14="http://schemas.microsoft.com/office/powerpoint/2010/main" val="1289355928"/>
+      </p:ext>
+    </p:extLst>
+  </p:cSld>
+  <p:clrMapOvr>
+    <a:masterClrMapping/>
+  </p:clrMapOvr>
+  <mc:AlternateContent xmlns:mc="http://schemas.openxmlformats.org/markup-compatibility/2006">
+    <mc:Choice xmlns:p14="http://schemas.microsoft.com/office/powerpoint/2010/main" Requires="p14">
+      <p:transition spd="slow" p14:dur="2000">
+        <p:cut/>
+      </p:transition>
+    </mc:Choice>
+    <mc:Fallback>
+      <p:transition spd="slow">
+        <p:cut/>
+      </p:transition>
+    </mc:Fallback>
+  </mc:AlternateContent>
+</p:sld>
+</file>
+
+<file path=ppt/slides/slide4.xml><?xml version="1.0" encoding="utf-8"?>
+<p:sld xmlns:a="http://schemas.openxmlformats.org/drawingml/2006/main" xmlns:r="http://schemas.openxmlformats.org/officeDocument/2006/relationships" xmlns:p="http://schemas.openxmlformats.org/presentationml/2006/main">
+  <p:cSld>
+    <p:spTree>
+      <p:nvGrpSpPr>
+        <p:cNvPr id="1" name=""/>
+        <p:cNvGrpSpPr/>
+        <p:nvPr/>
+      </p:nvGrpSpPr>
+      <p:grpSpPr>
+        <a:xfrm>
+          <a:off x="0" y="0"/>
+          <a:ext cx="0" cy="0"/>
+          <a:chOff x="0" y="0"/>
+          <a:chExt cx="0" cy="0"/>
+        </a:xfrm>
+      </p:grpSpPr>
+      <p:sp>
+        <p:nvSpPr>
+          <p:cNvPr id="2" name="標題 1">
+            <a:extLst>
+              <a:ext uri="{FF2B5EF4-FFF2-40B4-BE49-F238E27FC236}">
+                <a16:creationId xmlns:a16="http://schemas.microsoft.com/office/drawing/2014/main" id="{49FB9942-C542-9D22-2376-F1479FF94E63}"/>
+              </a:ext>
+            </a:extLst>
+          </p:cNvPr>
+          <p:cNvSpPr>
+            <a:spLocks noGrp="1"/>
+          </p:cNvSpPr>
+          <p:nvPr>
+            <p:ph type="title"/>
+          </p:nvPr>
+        </p:nvSpPr>
+        <p:spPr/>
+        <p:txBody>
+          <a:bodyPr/>
+          <a:lstStyle/>
+          <a:p>
+            <a:endParaRPr lang="zh-TW" altLang="en-US"/>
+          </a:p>
+        </p:txBody>
+      </p:sp>
+      <p:sp>
+        <p:nvSpPr>
+          <p:cNvPr id="3" name="內容版面配置區 2">
+            <a:extLst>
+              <a:ext uri="{FF2B5EF4-FFF2-40B4-BE49-F238E27FC236}">
+                <a16:creationId xmlns:a16="http://schemas.microsoft.com/office/drawing/2014/main" id="{5411817B-4144-F886-393F-686B728BF197}"/>
+              </a:ext>
+            </a:extLst>
+          </p:cNvPr>
+          <p:cNvSpPr>
+            <a:spLocks noGrp="1"/>
+          </p:cNvSpPr>
+          <p:nvPr>
+            <p:ph idx="1"/>
+          </p:nvPr>
+        </p:nvSpPr>
+        <p:spPr/>
+        <p:txBody>
+          <a:bodyPr/>
+          <a:lstStyle/>
+          <a:p>
+            <a:endParaRPr lang="zh-TW" altLang="en-US"/>
+          </a:p>
+        </p:txBody>
+      </p:sp>
+      <p:pic>
+        <p:nvPicPr>
+          <p:cNvPr id="5" name="圖片 4">
+            <a:extLst>
+              <a:ext uri="{FF2B5EF4-FFF2-40B4-BE49-F238E27FC236}">
+                <a16:creationId xmlns:a16="http://schemas.microsoft.com/office/drawing/2014/main" id="{95BABCA8-93B8-0E0A-3370-9A091A1CB32A}"/>
               </a:ext>
             </a:extLst>
           </p:cNvPr>
@@ -3475,8 +5164,63 @@
         </p:blipFill>
         <p:spPr>
           <a:xfrm>
-            <a:off x="0" y="968051"/>
-            <a:ext cx="12192000" cy="4921898"/>
+            <a:off x="1137260" y="0"/>
+            <a:ext cx="9917479" cy="6858000"/>
+          </a:xfrm>
+          <a:prstGeom prst="rect">
+            <a:avLst/>
+          </a:prstGeom>
+        </p:spPr>
+      </p:pic>
+      <p:pic>
+        <p:nvPicPr>
+          <p:cNvPr id="12" name="圖片 11">
+            <a:extLst>
+              <a:ext uri="{FF2B5EF4-FFF2-40B4-BE49-F238E27FC236}">
+                <a16:creationId xmlns:a16="http://schemas.microsoft.com/office/drawing/2014/main" id="{362AEBE0-9366-A461-80CA-D23CC05ABE11}"/>
+              </a:ext>
+            </a:extLst>
+          </p:cNvPr>
+          <p:cNvPicPr>
+            <a:picLocks noChangeAspect="1"/>
+          </p:cNvPicPr>
+          <p:nvPr/>
+        </p:nvPicPr>
+        <p:blipFill>
+          <a:blip r:embed="rId3">
+            <a:extLst>
+              <a:ext uri="{BEBA8EAE-BF5A-486C-A8C5-ECC9F3942E4B}">
+                <a14:imgProps xmlns:a14="http://schemas.microsoft.com/office/drawing/2010/main">
+                  <a14:imgLayer r:embed="rId4">
+                    <a14:imgEffect>
+                      <a14:backgroundRemoval t="2239" b="91045" l="9434" r="98742">
+                        <a14:foregroundMark x1="14465" y1="29104" x2="47799" y2="64179"/>
+                        <a14:foregroundMark x1="37736" y1="40299" x2="88679" y2="38060"/>
+                        <a14:foregroundMark x1="10692" y1="23881" x2="11321" y2="6716"/>
+                        <a14:foregroundMark x1="21384" y1="15672" x2="84277" y2="17910"/>
+                        <a14:foregroundMark x1="79245" y1="22388" x2="86164" y2="73134"/>
+                        <a14:foregroundMark x1="94340" y1="35821" x2="90566" y2="74627"/>
+                        <a14:foregroundMark x1="52830" y1="56716" x2="84277" y2="85075"/>
+                        <a14:foregroundMark x1="50314" y1="70149" x2="78616" y2="91045"/>
+                        <a14:foregroundMark x1="55975" y1="76866" x2="70440" y2="90299"/>
+                        <a14:foregroundMark x1="97484" y1="37313" x2="99371" y2="65672"/>
+                        <a14:foregroundMark x1="90566" y1="17164" x2="79245" y2="2239"/>
+                        <a14:backgroundMark x1="13208" y1="48507" x2="39623" y2="98507"/>
+                      </a14:backgroundRemoval>
+                    </a14:imgEffect>
+                  </a14:imgLayer>
+                </a14:imgProps>
+              </a:ext>
+            </a:extLst>
+          </a:blip>
+          <a:stretch>
+            <a:fillRect/>
+          </a:stretch>
+        </p:blipFill>
+        <p:spPr>
+          <a:xfrm>
+            <a:off x="4682980" y="4065948"/>
+            <a:ext cx="1514475" cy="1276350"/>
           </a:xfrm>
           <a:prstGeom prst="rect">
             <a:avLst/>
@@ -3488,7 +5232,7 @@
           <p:cNvPr id="14" name="圖片 13">
             <a:extLst>
               <a:ext uri="{FF2B5EF4-FFF2-40B4-BE49-F238E27FC236}">
-                <a16:creationId xmlns:a16="http://schemas.microsoft.com/office/drawing/2014/main" id="{96D19C27-DC10-B5D4-D793-B30A01976C5E}"/>
+                <a16:creationId xmlns:a16="http://schemas.microsoft.com/office/drawing/2014/main" id="{04EE499C-9F4D-AA19-9EF2-B4440859EB47}"/>
               </a:ext>
             </a:extLst>
           </p:cNvPr>
@@ -3498,105 +5242,393 @@
           <p:nvPr/>
         </p:nvPicPr>
         <p:blipFill>
-          <a:blip r:embed="rId3"/>
+          <a:blip r:embed="rId5">
+            <a:extLst>
+              <a:ext uri="{BEBA8EAE-BF5A-486C-A8C5-ECC9F3942E4B}">
+                <a14:imgProps xmlns:a14="http://schemas.microsoft.com/office/drawing/2010/main">
+                  <a14:imgLayer r:embed="rId6">
+                    <a14:imgEffect>
+                      <a14:backgroundRemoval t="6593" b="96703" l="2410" r="96386">
+                        <a14:foregroundMark x1="50602" y1="28571" x2="6024" y2="71429"/>
+                        <a14:foregroundMark x1="33735" y1="41758" x2="65060" y2="74725"/>
+                        <a14:foregroundMark x1="55422" y1="25275" x2="86747" y2="28571"/>
+                        <a14:foregroundMark x1="51807" y1="37363" x2="98795" y2="89011"/>
+                        <a14:foregroundMark x1="34940" y1="46154" x2="36145" y2="94505"/>
+                        <a14:foregroundMark x1="22892" y1="51648" x2="13253" y2="93407"/>
+                        <a14:foregroundMark x1="25301" y1="63736" x2="72289" y2="96703"/>
+                        <a14:foregroundMark x1="38554" y1="43956" x2="44578" y2="5495"/>
+                        <a14:backgroundMark x1="9639" y1="29670" x2="2410" y2="46154"/>
+                      </a14:backgroundRemoval>
+                    </a14:imgEffect>
+                  </a14:imgLayer>
+                </a14:imgProps>
+              </a:ext>
+            </a:extLst>
+          </a:blip>
           <a:stretch>
             <a:fillRect/>
           </a:stretch>
         </p:blipFill>
         <p:spPr>
           <a:xfrm>
-            <a:off x="4282528" y="1982901"/>
-            <a:ext cx="7909472" cy="3152256"/>
+            <a:off x="5571403" y="5408181"/>
+            <a:ext cx="884815" cy="970098"/>
           </a:xfrm>
           <a:prstGeom prst="rect">
             <a:avLst/>
           </a:prstGeom>
         </p:spPr>
       </p:pic>
-      <p:sp>
-        <p:nvSpPr>
-          <p:cNvPr id="15" name="標題 1">
-            <a:extLst>
-              <a:ext uri="{FF2B5EF4-FFF2-40B4-BE49-F238E27FC236}">
-                <a16:creationId xmlns:a16="http://schemas.microsoft.com/office/drawing/2014/main" id="{61F3FA1B-F31D-9271-AF4D-85CC0AAAFAF7}"/>
-              </a:ext>
-            </a:extLst>
-          </p:cNvPr>
-          <p:cNvSpPr txBox="1">
-            <a:spLocks/>
-          </p:cNvSpPr>
-          <p:nvPr/>
-        </p:nvSpPr>
-        <p:spPr>
-          <a:xfrm>
-            <a:off x="1320799" y="5135157"/>
-            <a:ext cx="11485419" cy="909716"/>
-          </a:xfrm>
-          <a:prstGeom prst="rect">
-            <a:avLst/>
-          </a:prstGeom>
-        </p:spPr>
-        <p:txBody>
-          <a:bodyPr vert="horz" lIns="91440" tIns="45720" rIns="91440" bIns="45720" rtlCol="0" anchor="ctr">
-            <a:normAutofit/>
-          </a:bodyPr>
-          <a:lstStyle>
-            <a:lvl1pPr algn="l" defTabSz="914400" rtl="0" eaLnBrk="1" latinLnBrk="0" hangingPunct="1">
-              <a:lnSpc>
-                <a:spcPct val="90000"/>
-              </a:lnSpc>
-              <a:spcBef>
-                <a:spcPct val="0"/>
-              </a:spcBef>
-              <a:buNone/>
-              <a:defRPr sz="4400" kern="1200">
-                <a:solidFill>
-                  <a:schemeClr val="tx1"/>
-                </a:solidFill>
-                <a:latin typeface="+mj-lt"/>
-                <a:ea typeface="+mj-ea"/>
-                <a:cs typeface="+mj-cs"/>
-              </a:defRPr>
-            </a:lvl1pPr>
-          </a:lstStyle>
-          <a:p>
-            <a:r>
-              <a:rPr lang="zh-TW" altLang="en-US" sz="2400" b="1"/>
-              <a:t>靶材</a:t>
-            </a:r>
-            <a:r>
-              <a:rPr lang="en-US" altLang="zh-TW" sz="2400" b="1"/>
-              <a:t>(</a:t>
-            </a:r>
-            <a:r>
-              <a:rPr lang="zh-TW" altLang="en-US" sz="2400" b="1"/>
-              <a:t>鎳單晶體</a:t>
-            </a:r>
-            <a:r>
-              <a:rPr lang="en-US" altLang="zh-TW" sz="2400" b="1"/>
-              <a:t>)</a:t>
-            </a:r>
-            <a:endParaRPr lang="zh-TW" altLang="en-US" sz="2400" b="1"/>
-          </a:p>
-        </p:txBody>
-      </p:sp>
     </p:spTree>
     <p:extLst>
       <p:ext uri="{BB962C8B-B14F-4D97-AF65-F5344CB8AC3E}">
-        <p14:creationId xmlns:p14="http://schemas.microsoft.com/office/powerpoint/2010/main" val="1163858083"/>
+        <p14:creationId xmlns:p14="http://schemas.microsoft.com/office/powerpoint/2010/main" val="929041204"/>
       </p:ext>
     </p:extLst>
   </p:cSld>
   <p:clrMapOvr>
     <a:masterClrMapping/>
   </p:clrMapOvr>
-  <mc:AlternateContent xmlns:mc="http://schemas.openxmlformats.org/markup-compatibility/2006" xmlns:p14="http://schemas.microsoft.com/office/powerpoint/2010/main">
-    <mc:Choice Requires="p14">
+  <mc:AlternateContent xmlns:mc="http://schemas.openxmlformats.org/markup-compatibility/2006">
+    <mc:Choice xmlns:p14="http://schemas.microsoft.com/office/powerpoint/2010/main" Requires="p14">
       <p:transition spd="slow" p14:dur="2000">
         <p:cut/>
       </p:transition>
     </mc:Choice>
-    <mc:Fallback xmlns="">
+    <mc:Fallback>
+      <p:transition spd="slow">
+        <p:cut/>
+      </p:transition>
+    </mc:Fallback>
+  </mc:AlternateContent>
+</p:sld>
+</file>
+
+<file path=ppt/slides/slide5.xml><?xml version="1.0" encoding="utf-8"?>
+<p:sld xmlns:a="http://schemas.openxmlformats.org/drawingml/2006/main" xmlns:r="http://schemas.openxmlformats.org/officeDocument/2006/relationships" xmlns:p="http://schemas.openxmlformats.org/presentationml/2006/main">
+  <p:cSld>
+    <p:spTree>
+      <p:nvGrpSpPr>
+        <p:cNvPr id="1" name=""/>
+        <p:cNvGrpSpPr/>
+        <p:nvPr/>
+      </p:nvGrpSpPr>
+      <p:grpSpPr>
+        <a:xfrm>
+          <a:off x="0" y="0"/>
+          <a:ext cx="0" cy="0"/>
+          <a:chOff x="0" y="0"/>
+          <a:chExt cx="0" cy="0"/>
+        </a:xfrm>
+      </p:grpSpPr>
+      <p:grpSp>
+        <p:nvGrpSpPr>
+          <p:cNvPr id="17" name="群組 16">
+            <a:extLst>
+              <a:ext uri="{FF2B5EF4-FFF2-40B4-BE49-F238E27FC236}">
+                <a16:creationId xmlns:a16="http://schemas.microsoft.com/office/drawing/2014/main" id="{863038E1-B49F-79E6-11D4-8CF5DEB4A792}"/>
+              </a:ext>
+            </a:extLst>
+          </p:cNvPr>
+          <p:cNvGrpSpPr/>
+          <p:nvPr/>
+        </p:nvGrpSpPr>
+        <p:grpSpPr>
+          <a:xfrm>
+            <a:off x="88954" y="148590"/>
+            <a:ext cx="12548811" cy="6858000"/>
+            <a:chOff x="-59636" y="0"/>
+            <a:chExt cx="12548811" cy="6858000"/>
+          </a:xfrm>
+        </p:grpSpPr>
+        <p:pic>
+          <p:nvPicPr>
+            <p:cNvPr id="8" name="圖片 7">
+              <a:extLst>
+                <a:ext uri="{FF2B5EF4-FFF2-40B4-BE49-F238E27FC236}">
+                  <a16:creationId xmlns:a16="http://schemas.microsoft.com/office/drawing/2014/main" id="{76B24C35-E0F8-BB53-7E6A-14130F701C69}"/>
+                </a:ext>
+              </a:extLst>
+            </p:cNvPr>
+            <p:cNvPicPr>
+              <a:picLocks noChangeAspect="1"/>
+            </p:cNvPicPr>
+            <p:nvPr/>
+          </p:nvPicPr>
+          <p:blipFill>
+            <a:blip r:embed="rId3"/>
+            <a:stretch>
+              <a:fillRect/>
+            </a:stretch>
+          </p:blipFill>
+          <p:spPr>
+            <a:xfrm>
+              <a:off x="4375078" y="0"/>
+              <a:ext cx="8114097" cy="6858000"/>
+            </a:xfrm>
+            <a:prstGeom prst="rect">
+              <a:avLst/>
+            </a:prstGeom>
+          </p:spPr>
+        </p:pic>
+        <p:pic>
+          <p:nvPicPr>
+            <p:cNvPr id="12" name="圖片 11">
+              <a:extLst>
+                <a:ext uri="{FF2B5EF4-FFF2-40B4-BE49-F238E27FC236}">
+                  <a16:creationId xmlns:a16="http://schemas.microsoft.com/office/drawing/2014/main" id="{ED643CAF-D072-C722-7589-492AF0A24BBE}"/>
+                </a:ext>
+              </a:extLst>
+            </p:cNvPr>
+            <p:cNvPicPr>
+              <a:picLocks noChangeAspect="1"/>
+            </p:cNvPicPr>
+            <p:nvPr/>
+          </p:nvPicPr>
+          <p:blipFill>
+            <a:blip r:embed="rId4"/>
+            <a:stretch>
+              <a:fillRect/>
+            </a:stretch>
+          </p:blipFill>
+          <p:spPr>
+            <a:xfrm>
+              <a:off x="-1" y="2845381"/>
+              <a:ext cx="4800601" cy="1055536"/>
+            </a:xfrm>
+            <a:prstGeom prst="rect">
+              <a:avLst/>
+            </a:prstGeom>
+          </p:spPr>
+        </p:pic>
+        <p:pic>
+          <p:nvPicPr>
+            <p:cNvPr id="14" name="圖片 13">
+              <a:extLst>
+                <a:ext uri="{FF2B5EF4-FFF2-40B4-BE49-F238E27FC236}">
+                  <a16:creationId xmlns:a16="http://schemas.microsoft.com/office/drawing/2014/main" id="{44FAFA02-FAC9-588F-EA5F-923D2EED1BFB}"/>
+                </a:ext>
+              </a:extLst>
+            </p:cNvPr>
+            <p:cNvPicPr>
+              <a:picLocks noChangeAspect="1"/>
+            </p:cNvPicPr>
+            <p:nvPr/>
+          </p:nvPicPr>
+          <p:blipFill>
+            <a:blip r:embed="rId5"/>
+            <a:stretch>
+              <a:fillRect/>
+            </a:stretch>
+          </p:blipFill>
+          <p:spPr>
+            <a:xfrm>
+              <a:off x="-59636" y="254482"/>
+              <a:ext cx="4860236" cy="1055536"/>
+            </a:xfrm>
+            <a:prstGeom prst="rect">
+              <a:avLst/>
+            </a:prstGeom>
+          </p:spPr>
+        </p:pic>
+        <p:pic>
+          <p:nvPicPr>
+            <p:cNvPr id="16" name="圖片 15">
+              <a:extLst>
+                <a:ext uri="{FF2B5EF4-FFF2-40B4-BE49-F238E27FC236}">
+                  <a16:creationId xmlns:a16="http://schemas.microsoft.com/office/drawing/2014/main" id="{3303A888-EAC0-751E-8C42-4ECF856B3212}"/>
+                </a:ext>
+              </a:extLst>
+            </p:cNvPr>
+            <p:cNvPicPr>
+              <a:picLocks noChangeAspect="1"/>
+            </p:cNvPicPr>
+            <p:nvPr/>
+          </p:nvPicPr>
+          <p:blipFill>
+            <a:blip r:embed="rId6"/>
+            <a:stretch>
+              <a:fillRect/>
+            </a:stretch>
+          </p:blipFill>
+          <p:spPr>
+            <a:xfrm>
+              <a:off x="-37782" y="1564500"/>
+              <a:ext cx="4838381" cy="1055536"/>
+            </a:xfrm>
+            <a:prstGeom prst="rect">
+              <a:avLst/>
+            </a:prstGeom>
+          </p:spPr>
+        </p:pic>
+      </p:grpSp>
+      <p:pic>
+        <p:nvPicPr>
+          <p:cNvPr id="21" name="圖片 20">
+            <a:extLst>
+              <a:ext uri="{FF2B5EF4-FFF2-40B4-BE49-F238E27FC236}">
+                <a16:creationId xmlns:a16="http://schemas.microsoft.com/office/drawing/2014/main" id="{1AAD9A6E-C6E5-14FD-13ED-F682D57ADA4D}"/>
+              </a:ext>
+            </a:extLst>
+          </p:cNvPr>
+          <p:cNvPicPr>
+            <a:picLocks noChangeAspect="1"/>
+          </p:cNvPicPr>
+          <p:nvPr/>
+        </p:nvPicPr>
+        <p:blipFill>
+          <a:blip r:embed="rId7"/>
+          <a:stretch>
+            <a:fillRect/>
+          </a:stretch>
+        </p:blipFill>
+        <p:spPr>
+          <a:xfrm>
+            <a:off x="4679288" y="5243827"/>
+            <a:ext cx="695422" cy="1543265"/>
+          </a:xfrm>
+          <a:prstGeom prst="rect">
+            <a:avLst/>
+          </a:prstGeom>
+        </p:spPr>
+      </p:pic>
+      <p:pic>
+        <p:nvPicPr>
+          <p:cNvPr id="23" name="圖片 22">
+            <a:extLst>
+              <a:ext uri="{FF2B5EF4-FFF2-40B4-BE49-F238E27FC236}">
+                <a16:creationId xmlns:a16="http://schemas.microsoft.com/office/drawing/2014/main" id="{2FBCF515-013B-9EAB-2966-8618092C4682}"/>
+              </a:ext>
+            </a:extLst>
+          </p:cNvPr>
+          <p:cNvPicPr>
+            <a:picLocks noChangeAspect="1"/>
+          </p:cNvPicPr>
+          <p:nvPr/>
+        </p:nvPicPr>
+        <p:blipFill>
+          <a:blip r:embed="rId7"/>
+          <a:stretch>
+            <a:fillRect/>
+          </a:stretch>
+        </p:blipFill>
+        <p:spPr>
+          <a:xfrm>
+            <a:off x="9908976" y="5243826"/>
+            <a:ext cx="695422" cy="1543265"/>
+          </a:xfrm>
+          <a:prstGeom prst="rect">
+            <a:avLst/>
+          </a:prstGeom>
+        </p:spPr>
+      </p:pic>
+      <p:sp>
+        <p:nvSpPr>
+          <p:cNvPr id="2" name="標題 1">
+            <a:extLst>
+              <a:ext uri="{FF2B5EF4-FFF2-40B4-BE49-F238E27FC236}">
+                <a16:creationId xmlns:a16="http://schemas.microsoft.com/office/drawing/2014/main" id="{F29EA4F0-5A2A-4AD6-2524-C94F79F96E31}"/>
+              </a:ext>
+            </a:extLst>
+          </p:cNvPr>
+          <p:cNvSpPr>
+            <a:spLocks noGrp="1"/>
+          </p:cNvSpPr>
+          <p:nvPr>
+            <p:ph type="title"/>
+          </p:nvPr>
+        </p:nvSpPr>
+        <p:spPr>
+          <a:xfrm>
+            <a:off x="838200" y="-1343819"/>
+            <a:ext cx="10515600" cy="1325563"/>
+          </a:xfrm>
+        </p:spPr>
+        <p:txBody>
+          <a:bodyPr/>
+          <a:lstStyle/>
+          <a:p>
+            <a:endParaRPr lang="zh-TW" altLang="en-US"/>
+          </a:p>
+        </p:txBody>
+      </p:sp>
+      <p:pic>
+        <p:nvPicPr>
+          <p:cNvPr id="19" name="圖片 18">
+            <a:extLst>
+              <a:ext uri="{FF2B5EF4-FFF2-40B4-BE49-F238E27FC236}">
+                <a16:creationId xmlns:a16="http://schemas.microsoft.com/office/drawing/2014/main" id="{BFD15EF0-A4C8-D5E8-64A8-52FFCD25E49C}"/>
+              </a:ext>
+            </a:extLst>
+          </p:cNvPr>
+          <p:cNvPicPr>
+            <a:picLocks noChangeAspect="1"/>
+          </p:cNvPicPr>
+          <p:nvPr/>
+        </p:nvPicPr>
+        <p:blipFill>
+          <a:blip r:embed="rId8"/>
+          <a:stretch>
+            <a:fillRect/>
+          </a:stretch>
+        </p:blipFill>
+        <p:spPr>
+          <a:xfrm>
+            <a:off x="67335" y="5989320"/>
+            <a:ext cx="4881854" cy="578274"/>
+          </a:xfrm>
+          <a:prstGeom prst="rect">
+            <a:avLst/>
+          </a:prstGeom>
+        </p:spPr>
+      </p:pic>
+      <p:pic>
+        <p:nvPicPr>
+          <p:cNvPr id="24" name="圖片 23">
+            <a:extLst>
+              <a:ext uri="{FF2B5EF4-FFF2-40B4-BE49-F238E27FC236}">
+                <a16:creationId xmlns:a16="http://schemas.microsoft.com/office/drawing/2014/main" id="{8F8FD99C-D54C-3A97-31C2-A11335E7E4F8}"/>
+              </a:ext>
+            </a:extLst>
+          </p:cNvPr>
+          <p:cNvPicPr>
+            <a:picLocks noChangeAspect="1"/>
+          </p:cNvPicPr>
+          <p:nvPr/>
+        </p:nvPicPr>
+        <p:blipFill>
+          <a:blip r:embed="rId9"/>
+          <a:stretch>
+            <a:fillRect/>
+          </a:stretch>
+        </p:blipFill>
+        <p:spPr>
+          <a:xfrm>
+            <a:off x="4892039" y="5296822"/>
+            <a:ext cx="5380258" cy="1334638"/>
+          </a:xfrm>
+          <a:prstGeom prst="rect">
+            <a:avLst/>
+          </a:prstGeom>
+        </p:spPr>
+      </p:pic>
+    </p:spTree>
+    <p:extLst>
+      <p:ext uri="{BB962C8B-B14F-4D97-AF65-F5344CB8AC3E}">
+        <p14:creationId xmlns:p14="http://schemas.microsoft.com/office/powerpoint/2010/main" val="2895117231"/>
+      </p:ext>
+    </p:extLst>
+  </p:cSld>
+  <p:clrMapOvr>
+    <a:masterClrMapping/>
+  </p:clrMapOvr>
+  <mc:AlternateContent xmlns:mc="http://schemas.openxmlformats.org/markup-compatibility/2006">
+    <mc:Choice xmlns:p14="http://schemas.microsoft.com/office/powerpoint/2010/main" Requires="p14">
+      <p:transition spd="slow" p14:dur="2000">
+        <p:cut/>
+      </p:transition>
+    </mc:Choice>
+    <mc:Fallback>
       <p:transition spd="slow">
         <p:cut/>
       </p:transition>
@@ -3898,4 +5930,299 @@
     </a:ext>
   </a:extLst>
 </a:theme>
+</file>
+
+<file path=ppt/theme/theme2.xml><?xml version="1.0" encoding="utf-8"?>
+<a:theme xmlns:a="http://schemas.openxmlformats.org/drawingml/2006/main" name="Office 佈景主題">
+  <a:themeElements>
+    <a:clrScheme name="Office">
+      <a:dk1>
+        <a:sysClr val="windowText" lastClr="000000"/>
+      </a:dk1>
+      <a:lt1>
+        <a:sysClr val="window" lastClr="FFFFFF"/>
+      </a:lt1>
+      <a:dk2>
+        <a:srgbClr val="44546A"/>
+      </a:dk2>
+      <a:lt2>
+        <a:srgbClr val="E7E6E6"/>
+      </a:lt2>
+      <a:accent1>
+        <a:srgbClr val="4472C4"/>
+      </a:accent1>
+      <a:accent2>
+        <a:srgbClr val="ED7D31"/>
+      </a:accent2>
+      <a:accent3>
+        <a:srgbClr val="A5A5A5"/>
+      </a:accent3>
+      <a:accent4>
+        <a:srgbClr val="FFC000"/>
+      </a:accent4>
+      <a:accent5>
+        <a:srgbClr val="5B9BD5"/>
+      </a:accent5>
+      <a:accent6>
+        <a:srgbClr val="70AD47"/>
+      </a:accent6>
+      <a:hlink>
+        <a:srgbClr val="0563C1"/>
+      </a:hlink>
+      <a:folHlink>
+        <a:srgbClr val="954F72"/>
+      </a:folHlink>
+    </a:clrScheme>
+    <a:fontScheme name="Office">
+      <a:majorFont>
+        <a:latin typeface="Calibri Light" panose="020F0302020204030204"/>
+        <a:ea typeface=""/>
+        <a:cs typeface=""/>
+        <a:font script="Jpan" typeface="游ゴシック Light"/>
+        <a:font script="Hang" typeface="맑은 고딕"/>
+        <a:font script="Hans" typeface="等线 Light"/>
+        <a:font script="Hant" typeface="新細明體"/>
+        <a:font script="Arab" typeface="Times New Roman"/>
+        <a:font script="Hebr" typeface="Times New Roman"/>
+        <a:font script="Thai" typeface="Angsana New"/>
+        <a:font script="Ethi" typeface="Nyala"/>
+        <a:font script="Beng" typeface="Vrinda"/>
+        <a:font script="Gujr" typeface="Shruti"/>
+        <a:font script="Khmr" typeface="MoolBoran"/>
+        <a:font script="Knda" typeface="Tunga"/>
+        <a:font script="Guru" typeface="Raavi"/>
+        <a:font script="Cans" typeface="Euphemia"/>
+        <a:font script="Cher" typeface="Plantagenet Cherokee"/>
+        <a:font script="Yiii" typeface="Microsoft Yi Baiti"/>
+        <a:font script="Tibt" typeface="Microsoft Himalaya"/>
+        <a:font script="Thaa" typeface="MV Boli"/>
+        <a:font script="Deva" typeface="Mangal"/>
+        <a:font script="Telu" typeface="Gautami"/>
+        <a:font script="Taml" typeface="Latha"/>
+        <a:font script="Syrc" typeface="Estrangelo Edessa"/>
+        <a:font script="Orya" typeface="Kalinga"/>
+        <a:font script="Mlym" typeface="Kartika"/>
+        <a:font script="Laoo" typeface="DokChampa"/>
+        <a:font script="Sinh" typeface="Iskoola Pota"/>
+        <a:font script="Mong" typeface="Mongolian Baiti"/>
+        <a:font script="Viet" typeface="Times New Roman"/>
+        <a:font script="Uigh" typeface="Microsoft Uighur"/>
+        <a:font script="Geor" typeface="Sylfaen"/>
+        <a:font script="Armn" typeface="Arial"/>
+        <a:font script="Bugi" typeface="Leelawadee UI"/>
+        <a:font script="Bopo" typeface="Microsoft JhengHei"/>
+        <a:font script="Java" typeface="Javanese Text"/>
+        <a:font script="Lisu" typeface="Segoe UI"/>
+        <a:font script="Mymr" typeface="Myanmar Text"/>
+        <a:font script="Nkoo" typeface="Ebrima"/>
+        <a:font script="Olck" typeface="Nirmala UI"/>
+        <a:font script="Osma" typeface="Ebrima"/>
+        <a:font script="Phag" typeface="Phagspa"/>
+        <a:font script="Syrn" typeface="Estrangelo Edessa"/>
+        <a:font script="Syrj" typeface="Estrangelo Edessa"/>
+        <a:font script="Syre" typeface="Estrangelo Edessa"/>
+        <a:font script="Sora" typeface="Nirmala UI"/>
+        <a:font script="Tale" typeface="Microsoft Tai Le"/>
+        <a:font script="Talu" typeface="Microsoft New Tai Lue"/>
+        <a:font script="Tfng" typeface="Ebrima"/>
+      </a:majorFont>
+      <a:minorFont>
+        <a:latin typeface="Calibri" panose="020F0502020204030204"/>
+        <a:ea typeface=""/>
+        <a:cs typeface=""/>
+        <a:font script="Jpan" typeface="游ゴシック"/>
+        <a:font script="Hang" typeface="맑은 고딕"/>
+        <a:font script="Hans" typeface="等线"/>
+        <a:font script="Hant" typeface="新細明體"/>
+        <a:font script="Arab" typeface="Arial"/>
+        <a:font script="Hebr" typeface="Arial"/>
+        <a:font script="Thai" typeface="Cordia New"/>
+        <a:font script="Ethi" typeface="Nyala"/>
+        <a:font script="Beng" typeface="Vrinda"/>
+        <a:font script="Gujr" typeface="Shruti"/>
+        <a:font script="Khmr" typeface="DaunPenh"/>
+        <a:font script="Knda" typeface="Tunga"/>
+        <a:font script="Guru" typeface="Raavi"/>
+        <a:font script="Cans" typeface="Euphemia"/>
+        <a:font script="Cher" typeface="Plantagenet Cherokee"/>
+        <a:font script="Yiii" typeface="Microsoft Yi Baiti"/>
+        <a:font script="Tibt" typeface="Microsoft Himalaya"/>
+        <a:font script="Thaa" typeface="MV Boli"/>
+        <a:font script="Deva" typeface="Mangal"/>
+        <a:font script="Telu" typeface="Gautami"/>
+        <a:font script="Taml" typeface="Latha"/>
+        <a:font script="Syrc" typeface="Estrangelo Edessa"/>
+        <a:font script="Orya" typeface="Kalinga"/>
+        <a:font script="Mlym" typeface="Kartika"/>
+        <a:font script="Laoo" typeface="DokChampa"/>
+        <a:font script="Sinh" typeface="Iskoola Pota"/>
+        <a:font script="Mong" typeface="Mongolian Baiti"/>
+        <a:font script="Viet" typeface="Arial"/>
+        <a:font script="Uigh" typeface="Microsoft Uighur"/>
+        <a:font script="Geor" typeface="Sylfaen"/>
+        <a:font script="Armn" typeface="Arial"/>
+        <a:font script="Bugi" typeface="Leelawadee UI"/>
+        <a:font script="Bopo" typeface="Microsoft JhengHei"/>
+        <a:font script="Java" typeface="Javanese Text"/>
+        <a:font script="Lisu" typeface="Segoe UI"/>
+        <a:font script="Mymr" typeface="Myanmar Text"/>
+        <a:font script="Nkoo" typeface="Ebrima"/>
+        <a:font script="Olck" typeface="Nirmala UI"/>
+        <a:font script="Osma" typeface="Ebrima"/>
+        <a:font script="Phag" typeface="Phagspa"/>
+        <a:font script="Syrn" typeface="Estrangelo Edessa"/>
+        <a:font script="Syrj" typeface="Estrangelo Edessa"/>
+        <a:font script="Syre" typeface="Estrangelo Edessa"/>
+        <a:font script="Sora" typeface="Nirmala UI"/>
+        <a:font script="Tale" typeface="Microsoft Tai Le"/>
+        <a:font script="Talu" typeface="Microsoft New Tai Lue"/>
+        <a:font script="Tfng" typeface="Ebrima"/>
+      </a:minorFont>
+    </a:fontScheme>
+    <a:fmtScheme name="Office">
+      <a:fillStyleLst>
+        <a:solidFill>
+          <a:schemeClr val="phClr"/>
+        </a:solidFill>
+        <a:gradFill rotWithShape="1">
+          <a:gsLst>
+            <a:gs pos="0">
+              <a:schemeClr val="phClr">
+                <a:lumMod val="110000"/>
+                <a:satMod val="105000"/>
+                <a:tint val="67000"/>
+              </a:schemeClr>
+            </a:gs>
+            <a:gs pos="50000">
+              <a:schemeClr val="phClr">
+                <a:lumMod val="105000"/>
+                <a:satMod val="103000"/>
+                <a:tint val="73000"/>
+              </a:schemeClr>
+            </a:gs>
+            <a:gs pos="100000">
+              <a:schemeClr val="phClr">
+                <a:lumMod val="105000"/>
+                <a:satMod val="109000"/>
+                <a:tint val="81000"/>
+              </a:schemeClr>
+            </a:gs>
+          </a:gsLst>
+          <a:lin ang="5400000" scaled="0"/>
+        </a:gradFill>
+        <a:gradFill rotWithShape="1">
+          <a:gsLst>
+            <a:gs pos="0">
+              <a:schemeClr val="phClr">
+                <a:satMod val="103000"/>
+                <a:lumMod val="102000"/>
+                <a:tint val="94000"/>
+              </a:schemeClr>
+            </a:gs>
+            <a:gs pos="50000">
+              <a:schemeClr val="phClr">
+                <a:satMod val="110000"/>
+                <a:lumMod val="100000"/>
+                <a:shade val="100000"/>
+              </a:schemeClr>
+            </a:gs>
+            <a:gs pos="100000">
+              <a:schemeClr val="phClr">
+                <a:lumMod val="99000"/>
+                <a:satMod val="120000"/>
+                <a:shade val="78000"/>
+              </a:schemeClr>
+            </a:gs>
+          </a:gsLst>
+          <a:lin ang="5400000" scaled="0"/>
+        </a:gradFill>
+      </a:fillStyleLst>
+      <a:lnStyleLst>
+        <a:ln w="6350" cap="flat" cmpd="sng" algn="ctr">
+          <a:solidFill>
+            <a:schemeClr val="phClr"/>
+          </a:solidFill>
+          <a:prstDash val="solid"/>
+          <a:miter lim="800000"/>
+        </a:ln>
+        <a:ln w="12700" cap="flat" cmpd="sng" algn="ctr">
+          <a:solidFill>
+            <a:schemeClr val="phClr"/>
+          </a:solidFill>
+          <a:prstDash val="solid"/>
+          <a:miter lim="800000"/>
+        </a:ln>
+        <a:ln w="19050" cap="flat" cmpd="sng" algn="ctr">
+          <a:solidFill>
+            <a:schemeClr val="phClr"/>
+          </a:solidFill>
+          <a:prstDash val="solid"/>
+          <a:miter lim="800000"/>
+        </a:ln>
+      </a:lnStyleLst>
+      <a:effectStyleLst>
+        <a:effectStyle>
+          <a:effectLst/>
+        </a:effectStyle>
+        <a:effectStyle>
+          <a:effectLst/>
+        </a:effectStyle>
+        <a:effectStyle>
+          <a:effectLst>
+            <a:outerShdw blurRad="57150" dist="19050" dir="5400000" algn="ctr" rotWithShape="0">
+              <a:srgbClr val="000000">
+                <a:alpha val="63000"/>
+              </a:srgbClr>
+            </a:outerShdw>
+          </a:effectLst>
+        </a:effectStyle>
+      </a:effectStyleLst>
+      <a:bgFillStyleLst>
+        <a:solidFill>
+          <a:schemeClr val="phClr"/>
+        </a:solidFill>
+        <a:solidFill>
+          <a:schemeClr val="phClr">
+            <a:tint val="95000"/>
+            <a:satMod val="170000"/>
+          </a:schemeClr>
+        </a:solidFill>
+        <a:gradFill rotWithShape="1">
+          <a:gsLst>
+            <a:gs pos="0">
+              <a:schemeClr val="phClr">
+                <a:tint val="93000"/>
+                <a:satMod val="150000"/>
+                <a:shade val="98000"/>
+                <a:lumMod val="102000"/>
+              </a:schemeClr>
+            </a:gs>
+            <a:gs pos="50000">
+              <a:schemeClr val="phClr">
+                <a:tint val="98000"/>
+                <a:satMod val="130000"/>
+                <a:shade val="90000"/>
+                <a:lumMod val="103000"/>
+              </a:schemeClr>
+            </a:gs>
+            <a:gs pos="100000">
+              <a:schemeClr val="phClr">
+                <a:shade val="63000"/>
+                <a:satMod val="120000"/>
+              </a:schemeClr>
+            </a:gs>
+          </a:gsLst>
+          <a:lin ang="5400000" scaled="0"/>
+        </a:gradFill>
+      </a:bgFillStyleLst>
+    </a:fmtScheme>
+  </a:themeElements>
+  <a:objectDefaults/>
+  <a:extraClrSchemeLst/>
+  <a:extLst>
+    <a:ext uri="{05A4C25C-085E-4340-85A3-A5531E510DB2}">
+      <thm15:themeFamily xmlns:thm15="http://schemas.microsoft.com/office/thememl/2012/main" name="Office Theme" id="{62F939B6-93AF-4DB8-9C6B-D6C7DFDC589F}" vid="{4A3C46E8-61CC-4603-A589-7422A47A8E4A}"/>
+    </a:ext>
+  </a:extLst>
+</a:theme>
 </file>